--- a/аисд.pptx
+++ b/аисд.pptx
@@ -2,7 +2,7 @@
 <file path=ppt/presentation.xml><?xml version="1.0" encoding="utf-8"?>
 <p:presentation xmlns:a="http://schemas.openxmlformats.org/drawingml/2006/main" xmlns:r="http://schemas.openxmlformats.org/officeDocument/2006/relationships" xmlns:p="http://schemas.openxmlformats.org/presentationml/2006/main" saveSubsetFonts="1">
   <p:sldMasterIdLst>
-    <p:sldMasterId id="2147483648" r:id="rId1"/>
+    <p:sldMasterId id="2147483960" r:id="rId1"/>
   </p:sldMasterIdLst>
   <p:sldIdLst>
     <p:sldId id="256" r:id="rId2"/>
@@ -20,9 +20,9 @@
   <p:notesSz cx="6858000" cy="9144000"/>
   <p:defaultTextStyle>
     <a:defPPr>
-      <a:defRPr lang="ru-RU"/>
+      <a:defRPr lang="en-US"/>
     </a:defPPr>
-    <a:lvl1pPr marL="0" algn="l" defTabSz="914400" rtl="0" eaLnBrk="1" latinLnBrk="0" hangingPunct="1">
+    <a:lvl1pPr marL="0" algn="l" defTabSz="457200" rtl="0" eaLnBrk="1" latinLnBrk="0" hangingPunct="1">
       <a:defRPr sz="1800" kern="1200">
         <a:solidFill>
           <a:schemeClr val="tx1"/>
@@ -32,7 +32,7 @@
         <a:cs typeface="+mn-cs"/>
       </a:defRPr>
     </a:lvl1pPr>
-    <a:lvl2pPr marL="457200" algn="l" defTabSz="914400" rtl="0" eaLnBrk="1" latinLnBrk="0" hangingPunct="1">
+    <a:lvl2pPr marL="457200" algn="l" defTabSz="457200" rtl="0" eaLnBrk="1" latinLnBrk="0" hangingPunct="1">
       <a:defRPr sz="1800" kern="1200">
         <a:solidFill>
           <a:schemeClr val="tx1"/>
@@ -42,7 +42,7 @@
         <a:cs typeface="+mn-cs"/>
       </a:defRPr>
     </a:lvl2pPr>
-    <a:lvl3pPr marL="914400" algn="l" defTabSz="914400" rtl="0" eaLnBrk="1" latinLnBrk="0" hangingPunct="1">
+    <a:lvl3pPr marL="914400" algn="l" defTabSz="457200" rtl="0" eaLnBrk="1" latinLnBrk="0" hangingPunct="1">
       <a:defRPr sz="1800" kern="1200">
         <a:solidFill>
           <a:schemeClr val="tx1"/>
@@ -52,7 +52,7 @@
         <a:cs typeface="+mn-cs"/>
       </a:defRPr>
     </a:lvl3pPr>
-    <a:lvl4pPr marL="1371600" algn="l" defTabSz="914400" rtl="0" eaLnBrk="1" latinLnBrk="0" hangingPunct="1">
+    <a:lvl4pPr marL="1371600" algn="l" defTabSz="457200" rtl="0" eaLnBrk="1" latinLnBrk="0" hangingPunct="1">
       <a:defRPr sz="1800" kern="1200">
         <a:solidFill>
           <a:schemeClr val="tx1"/>
@@ -62,7 +62,7 @@
         <a:cs typeface="+mn-cs"/>
       </a:defRPr>
     </a:lvl4pPr>
-    <a:lvl5pPr marL="1828800" algn="l" defTabSz="914400" rtl="0" eaLnBrk="1" latinLnBrk="0" hangingPunct="1">
+    <a:lvl5pPr marL="1828800" algn="l" defTabSz="457200" rtl="0" eaLnBrk="1" latinLnBrk="0" hangingPunct="1">
       <a:defRPr sz="1800" kern="1200">
         <a:solidFill>
           <a:schemeClr val="tx1"/>
@@ -72,7 +72,7 @@
         <a:cs typeface="+mn-cs"/>
       </a:defRPr>
     </a:lvl5pPr>
-    <a:lvl6pPr marL="2286000" algn="l" defTabSz="914400" rtl="0" eaLnBrk="1" latinLnBrk="0" hangingPunct="1">
+    <a:lvl6pPr marL="2286000" algn="l" defTabSz="457200" rtl="0" eaLnBrk="1" latinLnBrk="0" hangingPunct="1">
       <a:defRPr sz="1800" kern="1200">
         <a:solidFill>
           <a:schemeClr val="tx1"/>
@@ -82,7 +82,7 @@
         <a:cs typeface="+mn-cs"/>
       </a:defRPr>
     </a:lvl6pPr>
-    <a:lvl7pPr marL="2743200" algn="l" defTabSz="914400" rtl="0" eaLnBrk="1" latinLnBrk="0" hangingPunct="1">
+    <a:lvl7pPr marL="2743200" algn="l" defTabSz="457200" rtl="0" eaLnBrk="1" latinLnBrk="0" hangingPunct="1">
       <a:defRPr sz="1800" kern="1200">
         <a:solidFill>
           <a:schemeClr val="tx1"/>
@@ -92,7 +92,7 @@
         <a:cs typeface="+mn-cs"/>
       </a:defRPr>
     </a:lvl7pPr>
-    <a:lvl8pPr marL="3200400" algn="l" defTabSz="914400" rtl="0" eaLnBrk="1" latinLnBrk="0" hangingPunct="1">
+    <a:lvl8pPr marL="3200400" algn="l" defTabSz="457200" rtl="0" eaLnBrk="1" latinLnBrk="0" hangingPunct="1">
       <a:defRPr sz="1800" kern="1200">
         <a:solidFill>
           <a:schemeClr val="tx1"/>
@@ -102,7 +102,7 @@
         <a:cs typeface="+mn-cs"/>
       </a:defRPr>
     </a:lvl8pPr>
-    <a:lvl9pPr marL="3657600" algn="l" defTabSz="914400" rtl="0" eaLnBrk="1" latinLnBrk="0" hangingPunct="1">
+    <a:lvl9pPr marL="3657600" algn="l" defTabSz="457200" rtl="0" eaLnBrk="1" latinLnBrk="0" hangingPunct="1">
       <a:defRPr sz="1800" kern="1200">
         <a:solidFill>
           <a:schemeClr val="tx1"/>
@@ -8993,8 +8993,16 @@
 </file>
 
 <file path=ppt/slideLayouts/slideLayout1.xml><?xml version="1.0" encoding="utf-8"?>
-<p:sldLayout xmlns:a="http://schemas.openxmlformats.org/drawingml/2006/main" xmlns:r="http://schemas.openxmlformats.org/officeDocument/2006/relationships" xmlns:p="http://schemas.openxmlformats.org/presentationml/2006/main" type="title" preserve="1">
+<p:sldLayout xmlns:a="http://schemas.openxmlformats.org/drawingml/2006/main" xmlns:r="http://schemas.openxmlformats.org/officeDocument/2006/relationships" xmlns:p="http://schemas.openxmlformats.org/presentationml/2006/main" showMasterSp="0" type="title" preserve="1">
   <p:cSld name="Титульный слайд">
+    <p:bg>
+      <p:bgPr>
+        <a:solidFill>
+          <a:schemeClr val="bg2"/>
+        </a:solidFill>
+        <a:effectLst/>
+      </p:bgPr>
+    </p:bg>
     <p:spTree>
       <p:nvGrpSpPr>
         <p:cNvPr id="1" name=""/>
@@ -9011,13 +9019,7 @@
       </p:grpSpPr>
       <p:sp>
         <p:nvSpPr>
-          <p:cNvPr id="2" name="Заголовок 1">
-            <a:extLst>
-              <a:ext uri="{FF2B5EF4-FFF2-40B4-BE49-F238E27FC236}">
-                <a16:creationId xmlns:a16="http://schemas.microsoft.com/office/drawing/2014/main" id="{8B1805AE-95E1-4413-AC57-65B557ED751B}"/>
-              </a:ext>
-            </a:extLst>
-          </p:cNvPr>
+          <p:cNvPr id="2" name="Title 1"/>
           <p:cNvSpPr>
             <a:spLocks noGrp="1"/>
           </p:cNvSpPr>
@@ -9027,15 +9029,21 @@
         </p:nvSpPr>
         <p:spPr>
           <a:xfrm>
-            <a:off x="1524000" y="1122363"/>
-            <a:ext cx="9144000" cy="2387600"/>
+            <a:off x="1915128" y="1788454"/>
+            <a:ext cx="8361229" cy="2098226"/>
           </a:xfrm>
         </p:spPr>
         <p:txBody>
-          <a:bodyPr anchor="b"/>
+          <a:bodyPr anchor="b">
+            <a:noAutofit/>
+          </a:bodyPr>
           <a:lstStyle>
             <a:lvl1pPr algn="ctr">
-              <a:defRPr sz="6000"/>
+              <a:defRPr sz="7200" cap="all" baseline="0">
+                <a:solidFill>
+                  <a:schemeClr val="tx2"/>
+                </a:solidFill>
+              </a:defRPr>
             </a:lvl1pPr>
           </a:lstStyle>
           <a:p>
@@ -9043,18 +9051,13 @@
               <a:rPr lang="ru-RU"/>
               <a:t>Образец заголовка</a:t>
             </a:r>
+            <a:endParaRPr lang="en-US" dirty="0"/>
           </a:p>
         </p:txBody>
       </p:sp>
       <p:sp>
         <p:nvSpPr>
-          <p:cNvPr id="3" name="Подзаголовок 2">
-            <a:extLst>
-              <a:ext uri="{FF2B5EF4-FFF2-40B4-BE49-F238E27FC236}">
-                <a16:creationId xmlns:a16="http://schemas.microsoft.com/office/drawing/2014/main" id="{34627A54-C2A6-41DB-A3AC-6D4EF44ECD9C}"/>
-              </a:ext>
-            </a:extLst>
-          </p:cNvPr>
+          <p:cNvPr id="3" name="Subtitle 2"/>
           <p:cNvSpPr>
             <a:spLocks noGrp="1"/>
           </p:cNvSpPr>
@@ -9064,16 +9067,27 @@
         </p:nvSpPr>
         <p:spPr>
           <a:xfrm>
-            <a:off x="1524000" y="3602038"/>
-            <a:ext cx="9144000" cy="1655762"/>
+            <a:off x="2679906" y="3956279"/>
+            <a:ext cx="6831673" cy="1086237"/>
           </a:xfrm>
         </p:spPr>
         <p:txBody>
-          <a:bodyPr/>
+          <a:bodyPr>
+            <a:normAutofit/>
+          </a:bodyPr>
           <a:lstStyle>
             <a:lvl1pPr marL="0" indent="0" algn="ctr">
+              <a:lnSpc>
+                <a:spcPct val="112000"/>
+              </a:lnSpc>
+              <a:spcBef>
+                <a:spcPts val="0"/>
+              </a:spcBef>
+              <a:spcAft>
+                <a:spcPts val="0"/>
+              </a:spcAft>
               <a:buNone/>
-              <a:defRPr sz="2400"/>
+              <a:defRPr sz="2300"/>
             </a:lvl1pPr>
             <a:lvl2pPr marL="457200" indent="0" algn="ctr">
               <a:buNone/>
@@ -9113,18 +9127,356 @@
               <a:rPr lang="ru-RU"/>
               <a:t>Образец подзаголовка</a:t>
             </a:r>
+            <a:endParaRPr lang="en-US" dirty="0"/>
           </a:p>
         </p:txBody>
       </p:sp>
       <p:sp>
         <p:nvSpPr>
-          <p:cNvPr id="4" name="Дата 3">
-            <a:extLst>
-              <a:ext uri="{FF2B5EF4-FFF2-40B4-BE49-F238E27FC236}">
-                <a16:creationId xmlns:a16="http://schemas.microsoft.com/office/drawing/2014/main" id="{6476402C-A27C-4F1F-867D-64303108A5BC}"/>
-              </a:ext>
-            </a:extLst>
-          </p:cNvPr>
+          <p:cNvPr id="4" name="Date Placeholder 3"/>
+          <p:cNvSpPr>
+            <a:spLocks noGrp="1"/>
+          </p:cNvSpPr>
+          <p:nvPr>
+            <p:ph type="dt" sz="half" idx="10"/>
+          </p:nvPr>
+        </p:nvSpPr>
+        <p:spPr>
+          <a:xfrm>
+            <a:off x="752858" y="6453386"/>
+            <a:ext cx="1607944" cy="404614"/>
+          </a:xfrm>
+        </p:spPr>
+        <p:txBody>
+          <a:bodyPr/>
+          <a:lstStyle>
+            <a:lvl1pPr>
+              <a:defRPr baseline="0">
+                <a:solidFill>
+                  <a:schemeClr val="tx2"/>
+                </a:solidFill>
+              </a:defRPr>
+            </a:lvl1pPr>
+          </a:lstStyle>
+          <a:p>
+            <a:fld id="{8C24B0F7-C30C-415F-A326-7645160ABE3D}" type="datetimeFigureOut">
+              <a:rPr lang="ru-RU" smtClean="0"/>
+              <a:t>15.03.2026</a:t>
+            </a:fld>
+            <a:endParaRPr lang="ru-RU"/>
+          </a:p>
+        </p:txBody>
+      </p:sp>
+      <p:sp>
+        <p:nvSpPr>
+          <p:cNvPr id="5" name="Footer Placeholder 4"/>
+          <p:cNvSpPr>
+            <a:spLocks noGrp="1"/>
+          </p:cNvSpPr>
+          <p:nvPr>
+            <p:ph type="ftr" sz="quarter" idx="11"/>
+          </p:nvPr>
+        </p:nvSpPr>
+        <p:spPr>
+          <a:xfrm>
+            <a:off x="2584054" y="6453386"/>
+            <a:ext cx="7023377" cy="404614"/>
+          </a:xfrm>
+        </p:spPr>
+        <p:txBody>
+          <a:bodyPr/>
+          <a:lstStyle>
+            <a:lvl1pPr algn="ctr">
+              <a:defRPr baseline="0">
+                <a:solidFill>
+                  <a:schemeClr val="tx2"/>
+                </a:solidFill>
+              </a:defRPr>
+            </a:lvl1pPr>
+          </a:lstStyle>
+          <a:p>
+            <a:endParaRPr lang="ru-RU"/>
+          </a:p>
+        </p:txBody>
+      </p:sp>
+      <p:sp>
+        <p:nvSpPr>
+          <p:cNvPr id="6" name="Slide Number Placeholder 5"/>
+          <p:cNvSpPr>
+            <a:spLocks noGrp="1"/>
+          </p:cNvSpPr>
+          <p:nvPr>
+            <p:ph type="sldNum" sz="quarter" idx="12"/>
+          </p:nvPr>
+        </p:nvSpPr>
+        <p:spPr>
+          <a:xfrm>
+            <a:off x="9830683" y="6453386"/>
+            <a:ext cx="1596292" cy="404614"/>
+          </a:xfrm>
+        </p:spPr>
+        <p:txBody>
+          <a:bodyPr/>
+          <a:lstStyle>
+            <a:lvl1pPr>
+              <a:defRPr baseline="0">
+                <a:solidFill>
+                  <a:schemeClr val="tx2"/>
+                </a:solidFill>
+              </a:defRPr>
+            </a:lvl1pPr>
+          </a:lstStyle>
+          <a:p>
+            <a:fld id="{DC350E1C-3855-4554-9870-5D464E1CD647}" type="slidenum">
+              <a:rPr lang="ru-RU" smtClean="0"/>
+              <a:t>‹#›</a:t>
+            </a:fld>
+            <a:endParaRPr lang="ru-RU"/>
+          </a:p>
+        </p:txBody>
+      </p:sp>
+      <p:grpSp>
+        <p:nvGrpSpPr>
+          <p:cNvPr id="7" name="Group 6"/>
+          <p:cNvGrpSpPr/>
+          <p:nvPr/>
+        </p:nvGrpSpPr>
+        <p:grpSpPr>
+          <a:xfrm>
+            <a:off x="752858" y="744469"/>
+            <a:ext cx="10674117" cy="5349671"/>
+            <a:chOff x="752858" y="744469"/>
+            <a:chExt cx="10674117" cy="5349671"/>
+          </a:xfrm>
+        </p:grpSpPr>
+        <p:sp>
+          <p:nvSpPr>
+            <p:cNvPr id="11" name="Freeform 6"/>
+            <p:cNvSpPr/>
+            <p:nvPr/>
+          </p:nvSpPr>
+          <p:spPr bwMode="auto">
+            <a:xfrm>
+              <a:off x="8151962" y="1685652"/>
+              <a:ext cx="3275013" cy="4408488"/>
+            </a:xfrm>
+            <a:custGeom>
+              <a:avLst/>
+              <a:gdLst/>
+              <a:ahLst/>
+              <a:cxnLst/>
+              <a:rect l="l" t="t" r="r" b="b"/>
+              <a:pathLst>
+                <a:path w="10000" h="10000">
+                  <a:moveTo>
+                    <a:pt x="8761" y="0"/>
+                  </a:moveTo>
+                  <a:lnTo>
+                    <a:pt x="10000" y="0"/>
+                  </a:lnTo>
+                  <a:lnTo>
+                    <a:pt x="10000" y="10000"/>
+                  </a:lnTo>
+                  <a:lnTo>
+                    <a:pt x="0" y="10000"/>
+                  </a:lnTo>
+                  <a:lnTo>
+                    <a:pt x="0" y="9126"/>
+                  </a:lnTo>
+                  <a:lnTo>
+                    <a:pt x="8761" y="9127"/>
+                  </a:lnTo>
+                  <a:lnTo>
+                    <a:pt x="8761" y="0"/>
+                  </a:lnTo>
+                  <a:close/>
+                </a:path>
+              </a:pathLst>
+            </a:custGeom>
+            <a:solidFill>
+              <a:schemeClr val="tx2"/>
+            </a:solidFill>
+            <a:ln w="0">
+              <a:noFill/>
+              <a:prstDash val="solid"/>
+              <a:round/>
+              <a:headEnd/>
+              <a:tailEnd/>
+            </a:ln>
+          </p:spPr>
+        </p:sp>
+        <p:sp>
+          <p:nvSpPr>
+            <p:cNvPr id="14" name="Freeform 6"/>
+            <p:cNvSpPr/>
+            <p:nvPr/>
+          </p:nvSpPr>
+          <p:spPr bwMode="auto">
+            <a:xfrm flipH="1" flipV="1">
+              <a:off x="752858" y="744469"/>
+              <a:ext cx="3275668" cy="4408488"/>
+            </a:xfrm>
+            <a:custGeom>
+              <a:avLst/>
+              <a:gdLst/>
+              <a:ahLst/>
+              <a:cxnLst/>
+              <a:rect l="l" t="t" r="r" b="b"/>
+              <a:pathLst>
+                <a:path w="10002" h="10000">
+                  <a:moveTo>
+                    <a:pt x="8763" y="0"/>
+                  </a:moveTo>
+                  <a:lnTo>
+                    <a:pt x="10002" y="0"/>
+                  </a:lnTo>
+                  <a:lnTo>
+                    <a:pt x="10002" y="10000"/>
+                  </a:lnTo>
+                  <a:lnTo>
+                    <a:pt x="2" y="10000"/>
+                  </a:lnTo>
+                  <a:cubicBezTo>
+                    <a:pt x="-2" y="9698"/>
+                    <a:pt x="4" y="9427"/>
+                    <a:pt x="0" y="9125"/>
+                  </a:cubicBezTo>
+                  <a:lnTo>
+                    <a:pt x="8763" y="9128"/>
+                  </a:lnTo>
+                  <a:lnTo>
+                    <a:pt x="8763" y="0"/>
+                  </a:lnTo>
+                  <a:close/>
+                </a:path>
+              </a:pathLst>
+            </a:custGeom>
+            <a:solidFill>
+              <a:schemeClr val="tx2"/>
+            </a:solidFill>
+            <a:ln w="0">
+              <a:noFill/>
+              <a:prstDash val="solid"/>
+              <a:round/>
+              <a:headEnd/>
+              <a:tailEnd/>
+            </a:ln>
+          </p:spPr>
+        </p:sp>
+      </p:grpSp>
+    </p:spTree>
+    <p:extLst>
+      <p:ext uri="{BB962C8B-B14F-4D97-AF65-F5344CB8AC3E}">
+        <p14:creationId xmlns:p14="http://schemas.microsoft.com/office/powerpoint/2010/main" val="2097988856"/>
+      </p:ext>
+    </p:extLst>
+  </p:cSld>
+  <p:clrMapOvr>
+    <a:overrideClrMapping bg1="lt1" tx1="dk1" bg2="lt2" tx2="dk2" accent1="accent1" accent2="accent2" accent3="accent3" accent4="accent4" accent5="accent5" accent6="accent6" hlink="hlink" folHlink="folHlink"/>
+  </p:clrMapOvr>
+</p:sldLayout>
+</file>
+
+<file path=ppt/slideLayouts/slideLayout10.xml><?xml version="1.0" encoding="utf-8"?>
+<p:sldLayout xmlns:a="http://schemas.openxmlformats.org/drawingml/2006/main" xmlns:r="http://schemas.openxmlformats.org/officeDocument/2006/relationships" xmlns:p="http://schemas.openxmlformats.org/presentationml/2006/main" type="vertTx" preserve="1">
+  <p:cSld name="Заголовок и вертикальный текст">
+    <p:spTree>
+      <p:nvGrpSpPr>
+        <p:cNvPr id="1" name=""/>
+        <p:cNvGrpSpPr/>
+        <p:nvPr/>
+      </p:nvGrpSpPr>
+      <p:grpSpPr>
+        <a:xfrm>
+          <a:off x="0" y="0"/>
+          <a:ext cx="0" cy="0"/>
+          <a:chOff x="0" y="0"/>
+          <a:chExt cx="0" cy="0"/>
+        </a:xfrm>
+      </p:grpSpPr>
+      <p:sp>
+        <p:nvSpPr>
+          <p:cNvPr id="2" name="Title 1"/>
+          <p:cNvSpPr>
+            <a:spLocks noGrp="1"/>
+          </p:cNvSpPr>
+          <p:nvPr>
+            <p:ph type="title"/>
+          </p:nvPr>
+        </p:nvSpPr>
+        <p:spPr/>
+        <p:txBody>
+          <a:bodyPr/>
+          <a:lstStyle/>
+          <a:p>
+            <a:r>
+              <a:rPr lang="ru-RU"/>
+              <a:t>Образец заголовка</a:t>
+            </a:r>
+            <a:endParaRPr lang="en-US" dirty="0"/>
+          </a:p>
+        </p:txBody>
+      </p:sp>
+      <p:sp>
+        <p:nvSpPr>
+          <p:cNvPr id="3" name="Vertical Text Placeholder 2"/>
+          <p:cNvSpPr>
+            <a:spLocks noGrp="1"/>
+          </p:cNvSpPr>
+          <p:nvPr>
+            <p:ph type="body" orient="vert" idx="1"/>
+          </p:nvPr>
+        </p:nvSpPr>
+        <p:spPr>
+          <a:xfrm>
+            <a:off x="1371600" y="2295525"/>
+            <a:ext cx="9601200" cy="3571875"/>
+          </a:xfrm>
+        </p:spPr>
+        <p:txBody>
+          <a:bodyPr vert="eaVert"/>
+          <a:lstStyle/>
+          <a:p>
+            <a:pPr lvl="0"/>
+            <a:r>
+              <a:rPr lang="ru-RU"/>
+              <a:t>Образец текста</a:t>
+            </a:r>
+          </a:p>
+          <a:p>
+            <a:pPr lvl="1"/>
+            <a:r>
+              <a:rPr lang="ru-RU"/>
+              <a:t>Второй уровень</a:t>
+            </a:r>
+          </a:p>
+          <a:p>
+            <a:pPr lvl="2"/>
+            <a:r>
+              <a:rPr lang="ru-RU"/>
+              <a:t>Третий уровень</a:t>
+            </a:r>
+          </a:p>
+          <a:p>
+            <a:pPr lvl="3"/>
+            <a:r>
+              <a:rPr lang="ru-RU"/>
+              <a:t>Четвертый уровень</a:t>
+            </a:r>
+          </a:p>
+          <a:p>
+            <a:pPr lvl="4"/>
+            <a:r>
+              <a:rPr lang="ru-RU"/>
+              <a:t>Пятый уровень</a:t>
+            </a:r>
+            <a:endParaRPr lang="en-US" dirty="0"/>
+          </a:p>
+        </p:txBody>
+      </p:sp>
+      <p:sp>
+        <p:nvSpPr>
+          <p:cNvPr id="4" name="Date Placeholder 3"/>
           <p:cNvSpPr>
             <a:spLocks noGrp="1"/>
           </p:cNvSpPr>
@@ -9147,13 +9499,7 @@
       </p:sp>
       <p:sp>
         <p:nvSpPr>
-          <p:cNvPr id="5" name="Нижний колонтитул 4">
-            <a:extLst>
-              <a:ext uri="{FF2B5EF4-FFF2-40B4-BE49-F238E27FC236}">
-                <a16:creationId xmlns:a16="http://schemas.microsoft.com/office/drawing/2014/main" id="{CF18720F-F274-4A0C-9029-660B02DB382C}"/>
-              </a:ext>
-            </a:extLst>
-          </p:cNvPr>
+          <p:cNvPr id="5" name="Footer Placeholder 4"/>
           <p:cNvSpPr>
             <a:spLocks noGrp="1"/>
           </p:cNvSpPr>
@@ -9172,13 +9518,7 @@
       </p:sp>
       <p:sp>
         <p:nvSpPr>
-          <p:cNvPr id="6" name="Номер слайда 5">
-            <a:extLst>
-              <a:ext uri="{FF2B5EF4-FFF2-40B4-BE49-F238E27FC236}">
-                <a16:creationId xmlns:a16="http://schemas.microsoft.com/office/drawing/2014/main" id="{981CF3ED-3F51-4193-9526-3D37DE428D38}"/>
-              </a:ext>
-            </a:extLst>
-          </p:cNvPr>
+          <p:cNvPr id="6" name="Slide Number Placeholder 5"/>
           <p:cNvSpPr>
             <a:spLocks noGrp="1"/>
           </p:cNvSpPr>
@@ -9202,205 +9542,7 @@
     </p:spTree>
     <p:extLst>
       <p:ext uri="{BB962C8B-B14F-4D97-AF65-F5344CB8AC3E}">
-        <p14:creationId xmlns:p14="http://schemas.microsoft.com/office/powerpoint/2010/main" val="3937875167"/>
-      </p:ext>
-    </p:extLst>
-  </p:cSld>
-  <p:clrMapOvr>
-    <a:masterClrMapping/>
-  </p:clrMapOvr>
-</p:sldLayout>
-</file>
-
-<file path=ppt/slideLayouts/slideLayout10.xml><?xml version="1.0" encoding="utf-8"?>
-<p:sldLayout xmlns:a="http://schemas.openxmlformats.org/drawingml/2006/main" xmlns:r="http://schemas.openxmlformats.org/officeDocument/2006/relationships" xmlns:p="http://schemas.openxmlformats.org/presentationml/2006/main" type="vertTx" preserve="1">
-  <p:cSld name="Заголовок и вертикальный текст">
-    <p:spTree>
-      <p:nvGrpSpPr>
-        <p:cNvPr id="1" name=""/>
-        <p:cNvGrpSpPr/>
-        <p:nvPr/>
-      </p:nvGrpSpPr>
-      <p:grpSpPr>
-        <a:xfrm>
-          <a:off x="0" y="0"/>
-          <a:ext cx="0" cy="0"/>
-          <a:chOff x="0" y="0"/>
-          <a:chExt cx="0" cy="0"/>
-        </a:xfrm>
-      </p:grpSpPr>
-      <p:sp>
-        <p:nvSpPr>
-          <p:cNvPr id="2" name="Заголовок 1">
-            <a:extLst>
-              <a:ext uri="{FF2B5EF4-FFF2-40B4-BE49-F238E27FC236}">
-                <a16:creationId xmlns:a16="http://schemas.microsoft.com/office/drawing/2014/main" id="{76F05215-1661-43CF-8EA6-2104708A6C91}"/>
-              </a:ext>
-            </a:extLst>
-          </p:cNvPr>
-          <p:cNvSpPr>
-            <a:spLocks noGrp="1"/>
-          </p:cNvSpPr>
-          <p:nvPr>
-            <p:ph type="title"/>
-          </p:nvPr>
-        </p:nvSpPr>
-        <p:spPr/>
-        <p:txBody>
-          <a:bodyPr/>
-          <a:lstStyle/>
-          <a:p>
-            <a:r>
-              <a:rPr lang="ru-RU"/>
-              <a:t>Образец заголовка</a:t>
-            </a:r>
-          </a:p>
-        </p:txBody>
-      </p:sp>
-      <p:sp>
-        <p:nvSpPr>
-          <p:cNvPr id="3" name="Вертикальный текст 2">
-            <a:extLst>
-              <a:ext uri="{FF2B5EF4-FFF2-40B4-BE49-F238E27FC236}">
-                <a16:creationId xmlns:a16="http://schemas.microsoft.com/office/drawing/2014/main" id="{06F277D4-CCC6-4472-B261-2986E49F73C3}"/>
-              </a:ext>
-            </a:extLst>
-          </p:cNvPr>
-          <p:cNvSpPr>
-            <a:spLocks noGrp="1"/>
-          </p:cNvSpPr>
-          <p:nvPr>
-            <p:ph type="body" orient="vert" idx="1"/>
-          </p:nvPr>
-        </p:nvSpPr>
-        <p:spPr/>
-        <p:txBody>
-          <a:bodyPr vert="eaVert"/>
-          <a:lstStyle/>
-          <a:p>
-            <a:pPr lvl="0"/>
-            <a:r>
-              <a:rPr lang="ru-RU"/>
-              <a:t>Образец текста</a:t>
-            </a:r>
-          </a:p>
-          <a:p>
-            <a:pPr lvl="1"/>
-            <a:r>
-              <a:rPr lang="ru-RU"/>
-              <a:t>Второй уровень</a:t>
-            </a:r>
-          </a:p>
-          <a:p>
-            <a:pPr lvl="2"/>
-            <a:r>
-              <a:rPr lang="ru-RU"/>
-              <a:t>Третий уровень</a:t>
-            </a:r>
-          </a:p>
-          <a:p>
-            <a:pPr lvl="3"/>
-            <a:r>
-              <a:rPr lang="ru-RU"/>
-              <a:t>Четвертый уровень</a:t>
-            </a:r>
-          </a:p>
-          <a:p>
-            <a:pPr lvl="4"/>
-            <a:r>
-              <a:rPr lang="ru-RU"/>
-              <a:t>Пятый уровень</a:t>
-            </a:r>
-          </a:p>
-        </p:txBody>
-      </p:sp>
-      <p:sp>
-        <p:nvSpPr>
-          <p:cNvPr id="4" name="Дата 3">
-            <a:extLst>
-              <a:ext uri="{FF2B5EF4-FFF2-40B4-BE49-F238E27FC236}">
-                <a16:creationId xmlns:a16="http://schemas.microsoft.com/office/drawing/2014/main" id="{01A545CA-620B-43E4-8A92-0F72F2C9C044}"/>
-              </a:ext>
-            </a:extLst>
-          </p:cNvPr>
-          <p:cNvSpPr>
-            <a:spLocks noGrp="1"/>
-          </p:cNvSpPr>
-          <p:nvPr>
-            <p:ph type="dt" sz="half" idx="10"/>
-          </p:nvPr>
-        </p:nvSpPr>
-        <p:spPr/>
-        <p:txBody>
-          <a:bodyPr/>
-          <a:lstStyle/>
-          <a:p>
-            <a:fld id="{8C24B0F7-C30C-415F-A326-7645160ABE3D}" type="datetimeFigureOut">
-              <a:rPr lang="ru-RU" smtClean="0"/>
-              <a:t>15.03.2026</a:t>
-            </a:fld>
-            <a:endParaRPr lang="ru-RU"/>
-          </a:p>
-        </p:txBody>
-      </p:sp>
-      <p:sp>
-        <p:nvSpPr>
-          <p:cNvPr id="5" name="Нижний колонтитул 4">
-            <a:extLst>
-              <a:ext uri="{FF2B5EF4-FFF2-40B4-BE49-F238E27FC236}">
-                <a16:creationId xmlns:a16="http://schemas.microsoft.com/office/drawing/2014/main" id="{04D06435-6244-46BC-ADBB-A7401208BCE7}"/>
-              </a:ext>
-            </a:extLst>
-          </p:cNvPr>
-          <p:cNvSpPr>
-            <a:spLocks noGrp="1"/>
-          </p:cNvSpPr>
-          <p:nvPr>
-            <p:ph type="ftr" sz="quarter" idx="11"/>
-          </p:nvPr>
-        </p:nvSpPr>
-        <p:spPr/>
-        <p:txBody>
-          <a:bodyPr/>
-          <a:lstStyle/>
-          <a:p>
-            <a:endParaRPr lang="ru-RU"/>
-          </a:p>
-        </p:txBody>
-      </p:sp>
-      <p:sp>
-        <p:nvSpPr>
-          <p:cNvPr id="6" name="Номер слайда 5">
-            <a:extLst>
-              <a:ext uri="{FF2B5EF4-FFF2-40B4-BE49-F238E27FC236}">
-                <a16:creationId xmlns:a16="http://schemas.microsoft.com/office/drawing/2014/main" id="{A4EE2ABB-F3F8-412C-BE3A-F3F8F0AA5B14}"/>
-              </a:ext>
-            </a:extLst>
-          </p:cNvPr>
-          <p:cNvSpPr>
-            <a:spLocks noGrp="1"/>
-          </p:cNvSpPr>
-          <p:nvPr>
-            <p:ph type="sldNum" sz="quarter" idx="12"/>
-          </p:nvPr>
-        </p:nvSpPr>
-        <p:spPr/>
-        <p:txBody>
-          <a:bodyPr/>
-          <a:lstStyle/>
-          <a:p>
-            <a:fld id="{DC350E1C-3855-4554-9870-5D464E1CD647}" type="slidenum">
-              <a:rPr lang="ru-RU" smtClean="0"/>
-              <a:t>‹#›</a:t>
-            </a:fld>
-            <a:endParaRPr lang="ru-RU"/>
-          </a:p>
-        </p:txBody>
-      </p:sp>
-    </p:spTree>
-    <p:extLst>
-      <p:ext uri="{BB962C8B-B14F-4D97-AF65-F5344CB8AC3E}">
-        <p14:creationId xmlns:p14="http://schemas.microsoft.com/office/powerpoint/2010/main" val="733416895"/>
+        <p14:creationId xmlns:p14="http://schemas.microsoft.com/office/powerpoint/2010/main" val="321828383"/>
       </p:ext>
     </p:extLst>
   </p:cSld>
@@ -9429,13 +9571,7 @@
       </p:grpSpPr>
       <p:sp>
         <p:nvSpPr>
-          <p:cNvPr id="2" name="Вертикальный заголовок 1">
-            <a:extLst>
-              <a:ext uri="{FF2B5EF4-FFF2-40B4-BE49-F238E27FC236}">
-                <a16:creationId xmlns:a16="http://schemas.microsoft.com/office/drawing/2014/main" id="{43FE627E-E499-4DD5-8831-353D7CC0419E}"/>
-              </a:ext>
-            </a:extLst>
-          </p:cNvPr>
+          <p:cNvPr id="2" name="Vertical Title 1"/>
           <p:cNvSpPr>
             <a:spLocks noGrp="1"/>
           </p:cNvSpPr>
@@ -9445,8 +9581,8 @@
         </p:nvSpPr>
         <p:spPr>
           <a:xfrm>
-            <a:off x="8724900" y="365125"/>
-            <a:ext cx="2628900" cy="5811838"/>
+            <a:off x="9596561" y="624156"/>
+            <a:ext cx="1565766" cy="5243244"/>
           </a:xfrm>
         </p:spPr>
         <p:txBody>
@@ -9457,18 +9593,13 @@
               <a:rPr lang="ru-RU"/>
               <a:t>Образец заголовка</a:t>
             </a:r>
+            <a:endParaRPr lang="en-US" dirty="0"/>
           </a:p>
         </p:txBody>
       </p:sp>
       <p:sp>
         <p:nvSpPr>
-          <p:cNvPr id="3" name="Вертикальный текст 2">
-            <a:extLst>
-              <a:ext uri="{FF2B5EF4-FFF2-40B4-BE49-F238E27FC236}">
-                <a16:creationId xmlns:a16="http://schemas.microsoft.com/office/drawing/2014/main" id="{E6401E4D-3E1F-4793-BACF-26EFDA233DCD}"/>
-              </a:ext>
-            </a:extLst>
-          </p:cNvPr>
+          <p:cNvPr id="3" name="Vertical Text Placeholder 2"/>
           <p:cNvSpPr>
             <a:spLocks noGrp="1"/>
           </p:cNvSpPr>
@@ -9478,8 +9609,8 @@
         </p:nvSpPr>
         <p:spPr>
           <a:xfrm>
-            <a:off x="838200" y="365125"/>
-            <a:ext cx="7734300" cy="5811838"/>
+            <a:off x="1371600" y="624156"/>
+            <a:ext cx="8179641" cy="5243244"/>
           </a:xfrm>
         </p:spPr>
         <p:txBody>
@@ -9519,18 +9650,13 @@
               <a:rPr lang="ru-RU"/>
               <a:t>Пятый уровень</a:t>
             </a:r>
+            <a:endParaRPr lang="en-US" dirty="0"/>
           </a:p>
         </p:txBody>
       </p:sp>
       <p:sp>
         <p:nvSpPr>
-          <p:cNvPr id="4" name="Дата 3">
-            <a:extLst>
-              <a:ext uri="{FF2B5EF4-FFF2-40B4-BE49-F238E27FC236}">
-                <a16:creationId xmlns:a16="http://schemas.microsoft.com/office/drawing/2014/main" id="{785F7A2D-9410-4202-9BE0-65A389E89097}"/>
-              </a:ext>
-            </a:extLst>
-          </p:cNvPr>
+          <p:cNvPr id="4" name="Date Placeholder 3"/>
           <p:cNvSpPr>
             <a:spLocks noGrp="1"/>
           </p:cNvSpPr>
@@ -9553,13 +9679,7 @@
       </p:sp>
       <p:sp>
         <p:nvSpPr>
-          <p:cNvPr id="5" name="Нижний колонтитул 4">
-            <a:extLst>
-              <a:ext uri="{FF2B5EF4-FFF2-40B4-BE49-F238E27FC236}">
-                <a16:creationId xmlns:a16="http://schemas.microsoft.com/office/drawing/2014/main" id="{78E3E67F-34E2-4851-BE7C-00BC073FEDA4}"/>
-              </a:ext>
-            </a:extLst>
-          </p:cNvPr>
+          <p:cNvPr id="5" name="Footer Placeholder 4"/>
           <p:cNvSpPr>
             <a:spLocks noGrp="1"/>
           </p:cNvSpPr>
@@ -9578,13 +9698,7 @@
       </p:sp>
       <p:sp>
         <p:nvSpPr>
-          <p:cNvPr id="6" name="Номер слайда 5">
-            <a:extLst>
-              <a:ext uri="{FF2B5EF4-FFF2-40B4-BE49-F238E27FC236}">
-                <a16:creationId xmlns:a16="http://schemas.microsoft.com/office/drawing/2014/main" id="{EBC52AE9-3681-4EF8-AD34-394A09835E75}"/>
-              </a:ext>
-            </a:extLst>
-          </p:cNvPr>
+          <p:cNvPr id="6" name="Slide Number Placeholder 5"/>
           <p:cNvSpPr>
             <a:spLocks noGrp="1"/>
           </p:cNvSpPr>
@@ -9608,7 +9722,7 @@
     </p:spTree>
     <p:extLst>
       <p:ext uri="{BB962C8B-B14F-4D97-AF65-F5344CB8AC3E}">
-        <p14:creationId xmlns:p14="http://schemas.microsoft.com/office/powerpoint/2010/main" val="275861967"/>
+        <p14:creationId xmlns:p14="http://schemas.microsoft.com/office/powerpoint/2010/main" val="2394164932"/>
       </p:ext>
     </p:extLst>
   </p:cSld>
@@ -9637,13 +9751,7 @@
       </p:grpSpPr>
       <p:sp>
         <p:nvSpPr>
-          <p:cNvPr id="2" name="Заголовок 1">
-            <a:extLst>
-              <a:ext uri="{FF2B5EF4-FFF2-40B4-BE49-F238E27FC236}">
-                <a16:creationId xmlns:a16="http://schemas.microsoft.com/office/drawing/2014/main" id="{DC2636B6-93B6-413B-AC12-53FCBD91F9AD}"/>
-              </a:ext>
-            </a:extLst>
-          </p:cNvPr>
+          <p:cNvPr id="2" name="Title 1"/>
           <p:cNvSpPr>
             <a:spLocks noGrp="1"/>
           </p:cNvSpPr>
@@ -9660,18 +9768,13 @@
               <a:rPr lang="ru-RU"/>
               <a:t>Образец заголовка</a:t>
             </a:r>
+            <a:endParaRPr lang="en-US" dirty="0"/>
           </a:p>
         </p:txBody>
       </p:sp>
       <p:sp>
         <p:nvSpPr>
-          <p:cNvPr id="3" name="Объект 2">
-            <a:extLst>
-              <a:ext uri="{FF2B5EF4-FFF2-40B4-BE49-F238E27FC236}">
-                <a16:creationId xmlns:a16="http://schemas.microsoft.com/office/drawing/2014/main" id="{DD41CB61-22A2-4324-AE7D-6FFD225E8DCE}"/>
-              </a:ext>
-            </a:extLst>
-          </p:cNvPr>
+          <p:cNvPr id="3" name="Content Placeholder 2"/>
           <p:cNvSpPr>
             <a:spLocks noGrp="1"/>
           </p:cNvSpPr>
@@ -9717,18 +9820,13 @@
               <a:rPr lang="ru-RU"/>
               <a:t>Пятый уровень</a:t>
             </a:r>
+            <a:endParaRPr lang="en-US" dirty="0"/>
           </a:p>
         </p:txBody>
       </p:sp>
       <p:sp>
         <p:nvSpPr>
-          <p:cNvPr id="4" name="Дата 3">
-            <a:extLst>
-              <a:ext uri="{FF2B5EF4-FFF2-40B4-BE49-F238E27FC236}">
-                <a16:creationId xmlns:a16="http://schemas.microsoft.com/office/drawing/2014/main" id="{96ACBAA2-D6C0-4F87-91E5-791A95F30549}"/>
-              </a:ext>
-            </a:extLst>
-          </p:cNvPr>
+          <p:cNvPr id="4" name="Date Placeholder 3"/>
           <p:cNvSpPr>
             <a:spLocks noGrp="1"/>
           </p:cNvSpPr>
@@ -9751,13 +9849,7 @@
       </p:sp>
       <p:sp>
         <p:nvSpPr>
-          <p:cNvPr id="5" name="Нижний колонтитул 4">
-            <a:extLst>
-              <a:ext uri="{FF2B5EF4-FFF2-40B4-BE49-F238E27FC236}">
-                <a16:creationId xmlns:a16="http://schemas.microsoft.com/office/drawing/2014/main" id="{F71FD166-06B4-44F0-9131-0B1ACF722EE1}"/>
-              </a:ext>
-            </a:extLst>
-          </p:cNvPr>
+          <p:cNvPr id="5" name="Footer Placeholder 4"/>
           <p:cNvSpPr>
             <a:spLocks noGrp="1"/>
           </p:cNvSpPr>
@@ -9776,13 +9868,7 @@
       </p:sp>
       <p:sp>
         <p:nvSpPr>
-          <p:cNvPr id="6" name="Номер слайда 5">
-            <a:extLst>
-              <a:ext uri="{FF2B5EF4-FFF2-40B4-BE49-F238E27FC236}">
-                <a16:creationId xmlns:a16="http://schemas.microsoft.com/office/drawing/2014/main" id="{F287628B-92F0-4EAA-BC4A-139927185C70}"/>
-              </a:ext>
-            </a:extLst>
-          </p:cNvPr>
+          <p:cNvPr id="6" name="Slide Number Placeholder 5"/>
           <p:cNvSpPr>
             <a:spLocks noGrp="1"/>
           </p:cNvSpPr>
@@ -9806,7 +9892,7 @@
     </p:spTree>
     <p:extLst>
       <p:ext uri="{BB962C8B-B14F-4D97-AF65-F5344CB8AC3E}">
-        <p14:creationId xmlns:p14="http://schemas.microsoft.com/office/powerpoint/2010/main" val="2667908918"/>
+        <p14:creationId xmlns:p14="http://schemas.microsoft.com/office/powerpoint/2010/main" val="1686803641"/>
       </p:ext>
     </p:extLst>
   </p:cSld>
@@ -9817,8 +9903,13 @@
 </file>
 
 <file path=ppt/slideLayouts/slideLayout3.xml><?xml version="1.0" encoding="utf-8"?>
-<p:sldLayout xmlns:a="http://schemas.openxmlformats.org/drawingml/2006/main" xmlns:r="http://schemas.openxmlformats.org/officeDocument/2006/relationships" xmlns:p="http://schemas.openxmlformats.org/presentationml/2006/main" type="secHead" preserve="1">
+<p:sldLayout xmlns:a="http://schemas.openxmlformats.org/drawingml/2006/main" xmlns:r="http://schemas.openxmlformats.org/officeDocument/2006/relationships" xmlns:p="http://schemas.openxmlformats.org/presentationml/2006/main" showMasterSp="0" type="secHead" preserve="1">
   <p:cSld name="Заголовок раздела">
+    <p:bg>
+      <p:bgRef idx="1001">
+        <a:schemeClr val="bg2"/>
+      </p:bgRef>
+    </p:bg>
     <p:spTree>
       <p:nvGrpSpPr>
         <p:cNvPr id="1" name=""/>
@@ -9835,13 +9926,7 @@
       </p:grpSpPr>
       <p:sp>
         <p:nvSpPr>
-          <p:cNvPr id="2" name="Заголовок 1">
-            <a:extLst>
-              <a:ext uri="{FF2B5EF4-FFF2-40B4-BE49-F238E27FC236}">
-                <a16:creationId xmlns:a16="http://schemas.microsoft.com/office/drawing/2014/main" id="{0ED13EB3-2324-4BA6-83C9-DCB24EA8803A}"/>
-              </a:ext>
-            </a:extLst>
-          </p:cNvPr>
+          <p:cNvPr id="2" name="Title 1"/>
           <p:cNvSpPr>
             <a:spLocks noGrp="1"/>
           </p:cNvSpPr>
@@ -9851,15 +9936,21 @@
         </p:nvSpPr>
         <p:spPr>
           <a:xfrm>
-            <a:off x="831850" y="1709738"/>
-            <a:ext cx="10515600" cy="2852737"/>
+            <a:off x="765025" y="1301360"/>
+            <a:ext cx="9612971" cy="2852737"/>
           </a:xfrm>
         </p:spPr>
         <p:txBody>
-          <a:bodyPr anchor="b"/>
+          <a:bodyPr anchor="b">
+            <a:normAutofit/>
+          </a:bodyPr>
           <a:lstStyle>
-            <a:lvl1pPr>
-              <a:defRPr sz="6000"/>
+            <a:lvl1pPr algn="r">
+              <a:defRPr sz="7200" cap="all" baseline="0">
+                <a:solidFill>
+                  <a:schemeClr val="tx2"/>
+                </a:solidFill>
+              </a:defRPr>
             </a:lvl1pPr>
           </a:lstStyle>
           <a:p>
@@ -9867,18 +9958,13 @@
               <a:rPr lang="ru-RU"/>
               <a:t>Образец заголовка</a:t>
             </a:r>
+            <a:endParaRPr lang="en-US" dirty="0"/>
           </a:p>
         </p:txBody>
       </p:sp>
       <p:sp>
         <p:nvSpPr>
-          <p:cNvPr id="3" name="Текст 2">
-            <a:extLst>
-              <a:ext uri="{FF2B5EF4-FFF2-40B4-BE49-F238E27FC236}">
-                <a16:creationId xmlns:a16="http://schemas.microsoft.com/office/drawing/2014/main" id="{69F993F1-672E-4461-918D-20FD45E86109}"/>
-              </a:ext>
-            </a:extLst>
-          </p:cNvPr>
+          <p:cNvPr id="3" name="Text Placeholder 2"/>
           <p:cNvSpPr>
             <a:spLocks noGrp="1"/>
           </p:cNvSpPr>
@@ -9888,20 +9974,27 @@
         </p:nvSpPr>
         <p:spPr>
           <a:xfrm>
-            <a:off x="831850" y="4589463"/>
-            <a:ext cx="10515600" cy="1500187"/>
+            <a:off x="765025" y="4216328"/>
+            <a:ext cx="9612971" cy="1143324"/>
           </a:xfrm>
         </p:spPr>
         <p:txBody>
           <a:bodyPr/>
           <a:lstStyle>
-            <a:lvl1pPr marL="0" indent="0">
+            <a:lvl1pPr marL="0" indent="0" algn="r">
+              <a:lnSpc>
+                <a:spcPct val="112000"/>
+              </a:lnSpc>
+              <a:spcBef>
+                <a:spcPts val="0"/>
+              </a:spcBef>
+              <a:spcAft>
+                <a:spcPts val="0"/>
+              </a:spcAft>
               <a:buNone/>
               <a:defRPr sz="2400">
                 <a:solidFill>
-                  <a:schemeClr val="tx1">
-                    <a:tint val="75000"/>
-                  </a:schemeClr>
+                  <a:schemeClr val="tx2"/>
                 </a:solidFill>
               </a:defRPr>
             </a:lvl1pPr>
@@ -9997,13 +10090,414 @@
       </p:sp>
       <p:sp>
         <p:nvSpPr>
-          <p:cNvPr id="4" name="Дата 3">
-            <a:extLst>
-              <a:ext uri="{FF2B5EF4-FFF2-40B4-BE49-F238E27FC236}">
-                <a16:creationId xmlns:a16="http://schemas.microsoft.com/office/drawing/2014/main" id="{4C21CAA9-C7A1-49DA-AD6B-3FC06FA2D65E}"/>
-              </a:ext>
-            </a:extLst>
-          </p:cNvPr>
+          <p:cNvPr id="4" name="Date Placeholder 3"/>
+          <p:cNvSpPr>
+            <a:spLocks noGrp="1"/>
+          </p:cNvSpPr>
+          <p:nvPr>
+            <p:ph type="dt" sz="half" idx="10"/>
+          </p:nvPr>
+        </p:nvSpPr>
+        <p:spPr>
+          <a:xfrm>
+            <a:off x="738908" y="6453386"/>
+            <a:ext cx="1622409" cy="404614"/>
+          </a:xfrm>
+        </p:spPr>
+        <p:txBody>
+          <a:bodyPr/>
+          <a:lstStyle>
+            <a:lvl1pPr>
+              <a:defRPr>
+                <a:solidFill>
+                  <a:schemeClr val="tx2"/>
+                </a:solidFill>
+              </a:defRPr>
+            </a:lvl1pPr>
+          </a:lstStyle>
+          <a:p>
+            <a:fld id="{8C24B0F7-C30C-415F-A326-7645160ABE3D}" type="datetimeFigureOut">
+              <a:rPr lang="ru-RU" smtClean="0"/>
+              <a:t>15.03.2026</a:t>
+            </a:fld>
+            <a:endParaRPr lang="ru-RU"/>
+          </a:p>
+        </p:txBody>
+      </p:sp>
+      <p:sp>
+        <p:nvSpPr>
+          <p:cNvPr id="5" name="Footer Placeholder 4"/>
+          <p:cNvSpPr>
+            <a:spLocks noGrp="1"/>
+          </p:cNvSpPr>
+          <p:nvPr>
+            <p:ph type="ftr" sz="quarter" idx="11"/>
+          </p:nvPr>
+        </p:nvSpPr>
+        <p:spPr>
+          <a:xfrm>
+            <a:off x="2584312" y="6453386"/>
+            <a:ext cx="7023377" cy="404614"/>
+          </a:xfrm>
+        </p:spPr>
+        <p:txBody>
+          <a:bodyPr/>
+          <a:lstStyle>
+            <a:lvl1pPr algn="ctr">
+              <a:defRPr>
+                <a:solidFill>
+                  <a:schemeClr val="tx2"/>
+                </a:solidFill>
+              </a:defRPr>
+            </a:lvl1pPr>
+          </a:lstStyle>
+          <a:p>
+            <a:endParaRPr lang="ru-RU"/>
+          </a:p>
+        </p:txBody>
+      </p:sp>
+      <p:sp>
+        <p:nvSpPr>
+          <p:cNvPr id="6" name="Slide Number Placeholder 5"/>
+          <p:cNvSpPr>
+            <a:spLocks noGrp="1"/>
+          </p:cNvSpPr>
+          <p:nvPr>
+            <p:ph type="sldNum" sz="quarter" idx="12"/>
+          </p:nvPr>
+        </p:nvSpPr>
+        <p:spPr>
+          <a:xfrm>
+            <a:off x="9830683" y="6453386"/>
+            <a:ext cx="1596292" cy="404614"/>
+          </a:xfrm>
+        </p:spPr>
+        <p:txBody>
+          <a:bodyPr/>
+          <a:lstStyle>
+            <a:lvl1pPr>
+              <a:defRPr>
+                <a:solidFill>
+                  <a:schemeClr val="tx2"/>
+                </a:solidFill>
+              </a:defRPr>
+            </a:lvl1pPr>
+          </a:lstStyle>
+          <a:p>
+            <a:fld id="{DC350E1C-3855-4554-9870-5D464E1CD647}" type="slidenum">
+              <a:rPr lang="ru-RU" smtClean="0"/>
+              <a:t>‹#›</a:t>
+            </a:fld>
+            <a:endParaRPr lang="ru-RU"/>
+          </a:p>
+        </p:txBody>
+      </p:sp>
+      <p:sp>
+        <p:nvSpPr>
+          <p:cNvPr id="7" name="Freeform 6" title="Crop Mark"/>
+          <p:cNvSpPr/>
+          <p:nvPr/>
+        </p:nvSpPr>
+        <p:spPr bwMode="auto">
+          <a:xfrm>
+            <a:off x="8151962" y="1685652"/>
+            <a:ext cx="3275013" cy="4408488"/>
+          </a:xfrm>
+          <a:custGeom>
+            <a:avLst/>
+            <a:gdLst/>
+            <a:ahLst/>
+            <a:cxnLst/>
+            <a:rect l="0" t="0" r="r" b="b"/>
+            <a:pathLst>
+              <a:path w="4125" h="5554">
+                <a:moveTo>
+                  <a:pt x="3614" y="0"/>
+                </a:moveTo>
+                <a:lnTo>
+                  <a:pt x="4125" y="0"/>
+                </a:lnTo>
+                <a:lnTo>
+                  <a:pt x="4125" y="5554"/>
+                </a:lnTo>
+                <a:lnTo>
+                  <a:pt x="0" y="5554"/>
+                </a:lnTo>
+                <a:lnTo>
+                  <a:pt x="0" y="5074"/>
+                </a:lnTo>
+                <a:lnTo>
+                  <a:pt x="3614" y="5074"/>
+                </a:lnTo>
+                <a:lnTo>
+                  <a:pt x="3614" y="0"/>
+                </a:lnTo>
+                <a:close/>
+              </a:path>
+            </a:pathLst>
+          </a:custGeom>
+          <a:solidFill>
+            <a:schemeClr val="tx2"/>
+          </a:solidFill>
+          <a:ln w="0">
+            <a:noFill/>
+            <a:prstDash val="solid"/>
+            <a:round/>
+            <a:headEnd/>
+            <a:tailEnd/>
+          </a:ln>
+        </p:spPr>
+      </p:sp>
+    </p:spTree>
+    <p:extLst>
+      <p:ext uri="{BB962C8B-B14F-4D97-AF65-F5344CB8AC3E}">
+        <p14:creationId xmlns:p14="http://schemas.microsoft.com/office/powerpoint/2010/main" val="4097901551"/>
+      </p:ext>
+    </p:extLst>
+  </p:cSld>
+  <p:clrMapOvr>
+    <a:overrideClrMapping bg1="dk1" tx1="lt1" bg2="dk2" tx2="lt2" accent1="accent1" accent2="accent2" accent3="accent3" accent4="accent4" accent5="accent5" accent6="accent6" hlink="hlink" folHlink="folHlink"/>
+  </p:clrMapOvr>
+</p:sldLayout>
+</file>
+
+<file path=ppt/slideLayouts/slideLayout4.xml><?xml version="1.0" encoding="utf-8"?>
+<p:sldLayout xmlns:a="http://schemas.openxmlformats.org/drawingml/2006/main" xmlns:r="http://schemas.openxmlformats.org/officeDocument/2006/relationships" xmlns:p="http://schemas.openxmlformats.org/presentationml/2006/main" type="twoObj" preserve="1">
+  <p:cSld name="Два объекта">
+    <p:spTree>
+      <p:nvGrpSpPr>
+        <p:cNvPr id="1" name=""/>
+        <p:cNvGrpSpPr/>
+        <p:nvPr/>
+      </p:nvGrpSpPr>
+      <p:grpSpPr>
+        <a:xfrm>
+          <a:off x="0" y="0"/>
+          <a:ext cx="0" cy="0"/>
+          <a:chOff x="0" y="0"/>
+          <a:chExt cx="0" cy="0"/>
+        </a:xfrm>
+      </p:grpSpPr>
+      <p:sp>
+        <p:nvSpPr>
+          <p:cNvPr id="2" name="Title 1"/>
+          <p:cNvSpPr>
+            <a:spLocks noGrp="1"/>
+          </p:cNvSpPr>
+          <p:nvPr>
+            <p:ph type="title"/>
+          </p:nvPr>
+        </p:nvSpPr>
+        <p:spPr/>
+        <p:txBody>
+          <a:bodyPr/>
+          <a:lstStyle>
+            <a:lvl1pPr>
+              <a:defRPr>
+                <a:solidFill>
+                  <a:schemeClr val="tx2"/>
+                </a:solidFill>
+              </a:defRPr>
+            </a:lvl1pPr>
+          </a:lstStyle>
+          <a:p>
+            <a:r>
+              <a:rPr lang="ru-RU"/>
+              <a:t>Образец заголовка</a:t>
+            </a:r>
+            <a:endParaRPr lang="en-US" dirty="0"/>
+          </a:p>
+        </p:txBody>
+      </p:sp>
+      <p:sp>
+        <p:nvSpPr>
+          <p:cNvPr id="3" name="Content Placeholder 2"/>
+          <p:cNvSpPr>
+            <a:spLocks noGrp="1"/>
+          </p:cNvSpPr>
+          <p:nvPr>
+            <p:ph sz="half" idx="1"/>
+          </p:nvPr>
+        </p:nvSpPr>
+        <p:spPr>
+          <a:xfrm>
+            <a:off x="1371600" y="2285999"/>
+            <a:ext cx="4447786" cy="3581401"/>
+          </a:xfrm>
+        </p:spPr>
+        <p:txBody>
+          <a:bodyPr/>
+          <a:lstStyle>
+            <a:lvl1pPr>
+              <a:defRPr baseline="0">
+                <a:solidFill>
+                  <a:schemeClr val="tx2"/>
+                </a:solidFill>
+              </a:defRPr>
+            </a:lvl1pPr>
+            <a:lvl2pPr>
+              <a:defRPr baseline="0">
+                <a:solidFill>
+                  <a:schemeClr val="tx2"/>
+                </a:solidFill>
+              </a:defRPr>
+            </a:lvl2pPr>
+            <a:lvl3pPr>
+              <a:defRPr baseline="0">
+                <a:solidFill>
+                  <a:schemeClr val="tx2"/>
+                </a:solidFill>
+              </a:defRPr>
+            </a:lvl3pPr>
+            <a:lvl4pPr>
+              <a:defRPr baseline="0">
+                <a:solidFill>
+                  <a:schemeClr val="tx2"/>
+                </a:solidFill>
+              </a:defRPr>
+            </a:lvl4pPr>
+            <a:lvl5pPr>
+              <a:defRPr baseline="0">
+                <a:solidFill>
+                  <a:schemeClr val="tx2"/>
+                </a:solidFill>
+              </a:defRPr>
+            </a:lvl5pPr>
+          </a:lstStyle>
+          <a:p>
+            <a:pPr lvl="0"/>
+            <a:r>
+              <a:rPr lang="ru-RU"/>
+              <a:t>Образец текста</a:t>
+            </a:r>
+          </a:p>
+          <a:p>
+            <a:pPr lvl="1"/>
+            <a:r>
+              <a:rPr lang="ru-RU"/>
+              <a:t>Второй уровень</a:t>
+            </a:r>
+          </a:p>
+          <a:p>
+            <a:pPr lvl="2"/>
+            <a:r>
+              <a:rPr lang="ru-RU"/>
+              <a:t>Третий уровень</a:t>
+            </a:r>
+          </a:p>
+          <a:p>
+            <a:pPr lvl="3"/>
+            <a:r>
+              <a:rPr lang="ru-RU"/>
+              <a:t>Четвертый уровень</a:t>
+            </a:r>
+          </a:p>
+          <a:p>
+            <a:pPr lvl="4"/>
+            <a:r>
+              <a:rPr lang="ru-RU"/>
+              <a:t>Пятый уровень</a:t>
+            </a:r>
+            <a:endParaRPr lang="en-US" dirty="0"/>
+          </a:p>
+        </p:txBody>
+      </p:sp>
+      <p:sp>
+        <p:nvSpPr>
+          <p:cNvPr id="4" name="Content Placeholder 3"/>
+          <p:cNvSpPr>
+            <a:spLocks noGrp="1"/>
+          </p:cNvSpPr>
+          <p:nvPr>
+            <p:ph sz="half" idx="2"/>
+          </p:nvPr>
+        </p:nvSpPr>
+        <p:spPr>
+          <a:xfrm>
+            <a:off x="6525403" y="2285999"/>
+            <a:ext cx="4447786" cy="3581401"/>
+          </a:xfrm>
+        </p:spPr>
+        <p:txBody>
+          <a:bodyPr/>
+          <a:lstStyle>
+            <a:lvl1pPr>
+              <a:defRPr>
+                <a:solidFill>
+                  <a:schemeClr val="tx2"/>
+                </a:solidFill>
+              </a:defRPr>
+            </a:lvl1pPr>
+            <a:lvl2pPr>
+              <a:defRPr>
+                <a:solidFill>
+                  <a:schemeClr val="tx2"/>
+                </a:solidFill>
+              </a:defRPr>
+            </a:lvl2pPr>
+            <a:lvl3pPr>
+              <a:defRPr>
+                <a:solidFill>
+                  <a:schemeClr val="tx2"/>
+                </a:solidFill>
+              </a:defRPr>
+            </a:lvl3pPr>
+            <a:lvl4pPr>
+              <a:defRPr>
+                <a:solidFill>
+                  <a:schemeClr val="tx2"/>
+                </a:solidFill>
+              </a:defRPr>
+            </a:lvl4pPr>
+            <a:lvl5pPr>
+              <a:defRPr>
+                <a:solidFill>
+                  <a:schemeClr val="tx2"/>
+                </a:solidFill>
+              </a:defRPr>
+            </a:lvl5pPr>
+          </a:lstStyle>
+          <a:p>
+            <a:pPr lvl="0"/>
+            <a:r>
+              <a:rPr lang="ru-RU"/>
+              <a:t>Образец текста</a:t>
+            </a:r>
+          </a:p>
+          <a:p>
+            <a:pPr lvl="1"/>
+            <a:r>
+              <a:rPr lang="ru-RU"/>
+              <a:t>Второй уровень</a:t>
+            </a:r>
+          </a:p>
+          <a:p>
+            <a:pPr lvl="2"/>
+            <a:r>
+              <a:rPr lang="ru-RU"/>
+              <a:t>Третий уровень</a:t>
+            </a:r>
+          </a:p>
+          <a:p>
+            <a:pPr lvl="3"/>
+            <a:r>
+              <a:rPr lang="ru-RU"/>
+              <a:t>Четвертый уровень</a:t>
+            </a:r>
+          </a:p>
+          <a:p>
+            <a:pPr lvl="4"/>
+            <a:r>
+              <a:rPr lang="ru-RU"/>
+              <a:t>Пятый уровень</a:t>
+            </a:r>
+            <a:endParaRPr lang="en-US" dirty="0"/>
+          </a:p>
+        </p:txBody>
+      </p:sp>
+      <p:sp>
+        <p:nvSpPr>
+          <p:cNvPr id="5" name="Date Placeholder 4"/>
           <p:cNvSpPr>
             <a:spLocks noGrp="1"/>
           </p:cNvSpPr>
@@ -10026,13 +10520,7 @@
       </p:sp>
       <p:sp>
         <p:nvSpPr>
-          <p:cNvPr id="5" name="Нижний колонтитул 4">
-            <a:extLst>
-              <a:ext uri="{FF2B5EF4-FFF2-40B4-BE49-F238E27FC236}">
-                <a16:creationId xmlns:a16="http://schemas.microsoft.com/office/drawing/2014/main" id="{4290B1AA-634B-4395-9E93-AE8AA8BE32E3}"/>
-              </a:ext>
-            </a:extLst>
-          </p:cNvPr>
+          <p:cNvPr id="6" name="Footer Placeholder 5"/>
           <p:cNvSpPr>
             <a:spLocks noGrp="1"/>
           </p:cNvSpPr>
@@ -10051,13 +10539,7 @@
       </p:sp>
       <p:sp>
         <p:nvSpPr>
-          <p:cNvPr id="6" name="Номер слайда 5">
-            <a:extLst>
-              <a:ext uri="{FF2B5EF4-FFF2-40B4-BE49-F238E27FC236}">
-                <a16:creationId xmlns:a16="http://schemas.microsoft.com/office/drawing/2014/main" id="{6B948187-496F-4A42-969F-B1A1852871D3}"/>
-              </a:ext>
-            </a:extLst>
-          </p:cNvPr>
+          <p:cNvPr id="7" name="Slide Number Placeholder 6"/>
           <p:cNvSpPr>
             <a:spLocks noGrp="1"/>
           </p:cNvSpPr>
@@ -10081,272 +10563,7 @@
     </p:spTree>
     <p:extLst>
       <p:ext uri="{BB962C8B-B14F-4D97-AF65-F5344CB8AC3E}">
-        <p14:creationId xmlns:p14="http://schemas.microsoft.com/office/powerpoint/2010/main" val="2115964004"/>
-      </p:ext>
-    </p:extLst>
-  </p:cSld>
-  <p:clrMapOvr>
-    <a:masterClrMapping/>
-  </p:clrMapOvr>
-</p:sldLayout>
-</file>
-
-<file path=ppt/slideLayouts/slideLayout4.xml><?xml version="1.0" encoding="utf-8"?>
-<p:sldLayout xmlns:a="http://schemas.openxmlformats.org/drawingml/2006/main" xmlns:r="http://schemas.openxmlformats.org/officeDocument/2006/relationships" xmlns:p="http://schemas.openxmlformats.org/presentationml/2006/main" type="twoObj" preserve="1">
-  <p:cSld name="Два объекта">
-    <p:spTree>
-      <p:nvGrpSpPr>
-        <p:cNvPr id="1" name=""/>
-        <p:cNvGrpSpPr/>
-        <p:nvPr/>
-      </p:nvGrpSpPr>
-      <p:grpSpPr>
-        <a:xfrm>
-          <a:off x="0" y="0"/>
-          <a:ext cx="0" cy="0"/>
-          <a:chOff x="0" y="0"/>
-          <a:chExt cx="0" cy="0"/>
-        </a:xfrm>
-      </p:grpSpPr>
-      <p:sp>
-        <p:nvSpPr>
-          <p:cNvPr id="2" name="Заголовок 1">
-            <a:extLst>
-              <a:ext uri="{FF2B5EF4-FFF2-40B4-BE49-F238E27FC236}">
-                <a16:creationId xmlns:a16="http://schemas.microsoft.com/office/drawing/2014/main" id="{92704784-6C99-49DC-B748-3D973F43DFC2}"/>
-              </a:ext>
-            </a:extLst>
-          </p:cNvPr>
-          <p:cNvSpPr>
-            <a:spLocks noGrp="1"/>
-          </p:cNvSpPr>
-          <p:nvPr>
-            <p:ph type="title"/>
-          </p:nvPr>
-        </p:nvSpPr>
-        <p:spPr/>
-        <p:txBody>
-          <a:bodyPr/>
-          <a:lstStyle/>
-          <a:p>
-            <a:r>
-              <a:rPr lang="ru-RU"/>
-              <a:t>Образец заголовка</a:t>
-            </a:r>
-          </a:p>
-        </p:txBody>
-      </p:sp>
-      <p:sp>
-        <p:nvSpPr>
-          <p:cNvPr id="3" name="Объект 2">
-            <a:extLst>
-              <a:ext uri="{FF2B5EF4-FFF2-40B4-BE49-F238E27FC236}">
-                <a16:creationId xmlns:a16="http://schemas.microsoft.com/office/drawing/2014/main" id="{741281BD-6F13-402B-9EBD-995E5EC6150C}"/>
-              </a:ext>
-            </a:extLst>
-          </p:cNvPr>
-          <p:cNvSpPr>
-            <a:spLocks noGrp="1"/>
-          </p:cNvSpPr>
-          <p:nvPr>
-            <p:ph sz="half" idx="1"/>
-          </p:nvPr>
-        </p:nvSpPr>
-        <p:spPr>
-          <a:xfrm>
-            <a:off x="838200" y="1825625"/>
-            <a:ext cx="5181600" cy="4351338"/>
-          </a:xfrm>
-        </p:spPr>
-        <p:txBody>
-          <a:bodyPr/>
-          <a:lstStyle/>
-          <a:p>
-            <a:pPr lvl="0"/>
-            <a:r>
-              <a:rPr lang="ru-RU"/>
-              <a:t>Образец текста</a:t>
-            </a:r>
-          </a:p>
-          <a:p>
-            <a:pPr lvl="1"/>
-            <a:r>
-              <a:rPr lang="ru-RU"/>
-              <a:t>Второй уровень</a:t>
-            </a:r>
-          </a:p>
-          <a:p>
-            <a:pPr lvl="2"/>
-            <a:r>
-              <a:rPr lang="ru-RU"/>
-              <a:t>Третий уровень</a:t>
-            </a:r>
-          </a:p>
-          <a:p>
-            <a:pPr lvl="3"/>
-            <a:r>
-              <a:rPr lang="ru-RU"/>
-              <a:t>Четвертый уровень</a:t>
-            </a:r>
-          </a:p>
-          <a:p>
-            <a:pPr lvl="4"/>
-            <a:r>
-              <a:rPr lang="ru-RU"/>
-              <a:t>Пятый уровень</a:t>
-            </a:r>
-          </a:p>
-        </p:txBody>
-      </p:sp>
-      <p:sp>
-        <p:nvSpPr>
-          <p:cNvPr id="4" name="Объект 3">
-            <a:extLst>
-              <a:ext uri="{FF2B5EF4-FFF2-40B4-BE49-F238E27FC236}">
-                <a16:creationId xmlns:a16="http://schemas.microsoft.com/office/drawing/2014/main" id="{9FCA0D36-C7D5-49E9-9097-0ADA6E188646}"/>
-              </a:ext>
-            </a:extLst>
-          </p:cNvPr>
-          <p:cNvSpPr>
-            <a:spLocks noGrp="1"/>
-          </p:cNvSpPr>
-          <p:nvPr>
-            <p:ph sz="half" idx="2"/>
-          </p:nvPr>
-        </p:nvSpPr>
-        <p:spPr>
-          <a:xfrm>
-            <a:off x="6172200" y="1825625"/>
-            <a:ext cx="5181600" cy="4351338"/>
-          </a:xfrm>
-        </p:spPr>
-        <p:txBody>
-          <a:bodyPr/>
-          <a:lstStyle/>
-          <a:p>
-            <a:pPr lvl="0"/>
-            <a:r>
-              <a:rPr lang="ru-RU"/>
-              <a:t>Образец текста</a:t>
-            </a:r>
-          </a:p>
-          <a:p>
-            <a:pPr lvl="1"/>
-            <a:r>
-              <a:rPr lang="ru-RU"/>
-              <a:t>Второй уровень</a:t>
-            </a:r>
-          </a:p>
-          <a:p>
-            <a:pPr lvl="2"/>
-            <a:r>
-              <a:rPr lang="ru-RU"/>
-              <a:t>Третий уровень</a:t>
-            </a:r>
-          </a:p>
-          <a:p>
-            <a:pPr lvl="3"/>
-            <a:r>
-              <a:rPr lang="ru-RU"/>
-              <a:t>Четвертый уровень</a:t>
-            </a:r>
-          </a:p>
-          <a:p>
-            <a:pPr lvl="4"/>
-            <a:r>
-              <a:rPr lang="ru-RU"/>
-              <a:t>Пятый уровень</a:t>
-            </a:r>
-          </a:p>
-        </p:txBody>
-      </p:sp>
-      <p:sp>
-        <p:nvSpPr>
-          <p:cNvPr id="5" name="Дата 4">
-            <a:extLst>
-              <a:ext uri="{FF2B5EF4-FFF2-40B4-BE49-F238E27FC236}">
-                <a16:creationId xmlns:a16="http://schemas.microsoft.com/office/drawing/2014/main" id="{4E5DC9F4-5FEC-4D54-AB65-5147F12B9C71}"/>
-              </a:ext>
-            </a:extLst>
-          </p:cNvPr>
-          <p:cNvSpPr>
-            <a:spLocks noGrp="1"/>
-          </p:cNvSpPr>
-          <p:nvPr>
-            <p:ph type="dt" sz="half" idx="10"/>
-          </p:nvPr>
-        </p:nvSpPr>
-        <p:spPr/>
-        <p:txBody>
-          <a:bodyPr/>
-          <a:lstStyle/>
-          <a:p>
-            <a:fld id="{8C24B0F7-C30C-415F-A326-7645160ABE3D}" type="datetimeFigureOut">
-              <a:rPr lang="ru-RU" smtClean="0"/>
-              <a:t>15.03.2026</a:t>
-            </a:fld>
-            <a:endParaRPr lang="ru-RU"/>
-          </a:p>
-        </p:txBody>
-      </p:sp>
-      <p:sp>
-        <p:nvSpPr>
-          <p:cNvPr id="6" name="Нижний колонтитул 5">
-            <a:extLst>
-              <a:ext uri="{FF2B5EF4-FFF2-40B4-BE49-F238E27FC236}">
-                <a16:creationId xmlns:a16="http://schemas.microsoft.com/office/drawing/2014/main" id="{BA9731CD-3CE8-4F69-879D-E9FEE88F8F3A}"/>
-              </a:ext>
-            </a:extLst>
-          </p:cNvPr>
-          <p:cNvSpPr>
-            <a:spLocks noGrp="1"/>
-          </p:cNvSpPr>
-          <p:nvPr>
-            <p:ph type="ftr" sz="quarter" idx="11"/>
-          </p:nvPr>
-        </p:nvSpPr>
-        <p:spPr/>
-        <p:txBody>
-          <a:bodyPr/>
-          <a:lstStyle/>
-          <a:p>
-            <a:endParaRPr lang="ru-RU"/>
-          </a:p>
-        </p:txBody>
-      </p:sp>
-      <p:sp>
-        <p:nvSpPr>
-          <p:cNvPr id="7" name="Номер слайда 6">
-            <a:extLst>
-              <a:ext uri="{FF2B5EF4-FFF2-40B4-BE49-F238E27FC236}">
-                <a16:creationId xmlns:a16="http://schemas.microsoft.com/office/drawing/2014/main" id="{32A5ECD0-F1CC-4907-BC1C-ED0713A8BA98}"/>
-              </a:ext>
-            </a:extLst>
-          </p:cNvPr>
-          <p:cNvSpPr>
-            <a:spLocks noGrp="1"/>
-          </p:cNvSpPr>
-          <p:nvPr>
-            <p:ph type="sldNum" sz="quarter" idx="12"/>
-          </p:nvPr>
-        </p:nvSpPr>
-        <p:spPr/>
-        <p:txBody>
-          <a:bodyPr/>
-          <a:lstStyle/>
-          <a:p>
-            <a:fld id="{DC350E1C-3855-4554-9870-5D464E1CD647}" type="slidenum">
-              <a:rPr lang="ru-RU" smtClean="0"/>
-              <a:t>‹#›</a:t>
-            </a:fld>
-            <a:endParaRPr lang="ru-RU"/>
-          </a:p>
-        </p:txBody>
-      </p:sp>
-    </p:spTree>
-    <p:extLst>
-      <p:ext uri="{BB962C8B-B14F-4D97-AF65-F5344CB8AC3E}">
-        <p14:creationId xmlns:p14="http://schemas.microsoft.com/office/powerpoint/2010/main" val="251516826"/>
+        <p14:creationId xmlns:p14="http://schemas.microsoft.com/office/powerpoint/2010/main" val="1930107239"/>
       </p:ext>
     </p:extLst>
   </p:cSld>
@@ -10375,13 +10592,7 @@
       </p:grpSpPr>
       <p:sp>
         <p:nvSpPr>
-          <p:cNvPr id="2" name="Заголовок 1">
-            <a:extLst>
-              <a:ext uri="{FF2B5EF4-FFF2-40B4-BE49-F238E27FC236}">
-                <a16:creationId xmlns:a16="http://schemas.microsoft.com/office/drawing/2014/main" id="{D334351B-A970-4F61-B5CB-6BB33821217C}"/>
-              </a:ext>
-            </a:extLst>
-          </p:cNvPr>
+          <p:cNvPr id="2" name="Title 1"/>
           <p:cNvSpPr>
             <a:spLocks noGrp="1"/>
           </p:cNvSpPr>
@@ -10391,30 +10602,33 @@
         </p:nvSpPr>
         <p:spPr>
           <a:xfrm>
-            <a:off x="839788" y="365125"/>
-            <a:ext cx="10515600" cy="1325563"/>
+            <a:off x="1371600" y="685800"/>
+            <a:ext cx="9601200" cy="1485900"/>
           </a:xfrm>
         </p:spPr>
         <p:txBody>
           <a:bodyPr/>
-          <a:lstStyle/>
+          <a:lstStyle>
+            <a:lvl1pPr>
+              <a:defRPr>
+                <a:solidFill>
+                  <a:schemeClr val="tx2"/>
+                </a:solidFill>
+              </a:defRPr>
+            </a:lvl1pPr>
+          </a:lstStyle>
           <a:p>
             <a:r>
               <a:rPr lang="ru-RU"/>
               <a:t>Образец заголовка</a:t>
             </a:r>
+            <a:endParaRPr lang="en-US" dirty="0"/>
           </a:p>
         </p:txBody>
       </p:sp>
       <p:sp>
         <p:nvSpPr>
-          <p:cNvPr id="3" name="Текст 2">
-            <a:extLst>
-              <a:ext uri="{FF2B5EF4-FFF2-40B4-BE49-F238E27FC236}">
-                <a16:creationId xmlns:a16="http://schemas.microsoft.com/office/drawing/2014/main" id="{753DEF02-7CA2-4136-B6D1-91F239A9C5D8}"/>
-              </a:ext>
-            </a:extLst>
-          </p:cNvPr>
+          <p:cNvPr id="3" name="Text Placeholder 2"/>
           <p:cNvSpPr>
             <a:spLocks noGrp="1"/>
           </p:cNvSpPr>
@@ -10424,16 +10638,31 @@
         </p:nvSpPr>
         <p:spPr>
           <a:xfrm>
-            <a:off x="839788" y="1681163"/>
-            <a:ext cx="5157787" cy="823912"/>
+            <a:off x="1371600" y="2340864"/>
+            <a:ext cx="4443984" cy="823912"/>
           </a:xfrm>
         </p:spPr>
         <p:txBody>
-          <a:bodyPr anchor="b"/>
+          <a:bodyPr anchor="b">
+            <a:noAutofit/>
+          </a:bodyPr>
           <a:lstStyle>
             <a:lvl1pPr marL="0" indent="0">
+              <a:lnSpc>
+                <a:spcPct val="84000"/>
+              </a:lnSpc>
+              <a:spcBef>
+                <a:spcPts val="0"/>
+              </a:spcBef>
+              <a:spcAft>
+                <a:spcPts val="0"/>
+              </a:spcAft>
               <a:buNone/>
-              <a:defRPr sz="2400" b="1"/>
+              <a:defRPr sz="3000" b="0" baseline="0">
+                <a:solidFill>
+                  <a:schemeClr val="tx2"/>
+                </a:solidFill>
+              </a:defRPr>
             </a:lvl1pPr>
             <a:lvl2pPr marL="457200" indent="0">
               <a:buNone/>
@@ -10479,13 +10708,7 @@
       </p:sp>
       <p:sp>
         <p:nvSpPr>
-          <p:cNvPr id="4" name="Объект 3">
-            <a:extLst>
-              <a:ext uri="{FF2B5EF4-FFF2-40B4-BE49-F238E27FC236}">
-                <a16:creationId xmlns:a16="http://schemas.microsoft.com/office/drawing/2014/main" id="{4CE55DEA-12FF-4B95-863B-E368DC0483E9}"/>
-              </a:ext>
-            </a:extLst>
-          </p:cNvPr>
+          <p:cNvPr id="4" name="Content Placeholder 3"/>
           <p:cNvSpPr>
             <a:spLocks noGrp="1"/>
           </p:cNvSpPr>
@@ -10495,13 +10718,49 @@
         </p:nvSpPr>
         <p:spPr>
           <a:xfrm>
-            <a:off x="839788" y="2505075"/>
-            <a:ext cx="5157787" cy="3684588"/>
+            <a:off x="1371600" y="3305207"/>
+            <a:ext cx="4443984" cy="2562193"/>
           </a:xfrm>
         </p:spPr>
         <p:txBody>
           <a:bodyPr/>
-          <a:lstStyle/>
+          <a:lstStyle>
+            <a:lvl1pPr>
+              <a:defRPr baseline="0">
+                <a:solidFill>
+                  <a:schemeClr val="tx2"/>
+                </a:solidFill>
+              </a:defRPr>
+            </a:lvl1pPr>
+            <a:lvl2pPr>
+              <a:defRPr baseline="0">
+                <a:solidFill>
+                  <a:schemeClr val="tx2"/>
+                </a:solidFill>
+              </a:defRPr>
+            </a:lvl2pPr>
+            <a:lvl3pPr>
+              <a:defRPr baseline="0">
+                <a:solidFill>
+                  <a:schemeClr val="tx2"/>
+                </a:solidFill>
+              </a:defRPr>
+            </a:lvl3pPr>
+            <a:lvl4pPr>
+              <a:defRPr baseline="0">
+                <a:solidFill>
+                  <a:schemeClr val="tx2"/>
+                </a:solidFill>
+              </a:defRPr>
+            </a:lvl4pPr>
+            <a:lvl5pPr>
+              <a:defRPr baseline="0">
+                <a:solidFill>
+                  <a:schemeClr val="tx2"/>
+                </a:solidFill>
+              </a:defRPr>
+            </a:lvl5pPr>
+          </a:lstStyle>
           <a:p>
             <a:pPr lvl="0"/>
             <a:r>
@@ -10536,18 +10795,13 @@
               <a:rPr lang="ru-RU"/>
               <a:t>Пятый уровень</a:t>
             </a:r>
+            <a:endParaRPr lang="en-US" dirty="0"/>
           </a:p>
         </p:txBody>
       </p:sp>
       <p:sp>
         <p:nvSpPr>
-          <p:cNvPr id="5" name="Текст 4">
-            <a:extLst>
-              <a:ext uri="{FF2B5EF4-FFF2-40B4-BE49-F238E27FC236}">
-                <a16:creationId xmlns:a16="http://schemas.microsoft.com/office/drawing/2014/main" id="{C443CFA0-6944-4C0C-BB2A-2F80B9F3B02E}"/>
-              </a:ext>
-            </a:extLst>
-          </p:cNvPr>
+          <p:cNvPr id="5" name="Text Placeholder 4"/>
           <p:cNvSpPr>
             <a:spLocks noGrp="1"/>
           </p:cNvSpPr>
@@ -10557,16 +10811,31 @@
         </p:nvSpPr>
         <p:spPr>
           <a:xfrm>
-            <a:off x="6172200" y="1681163"/>
-            <a:ext cx="5183188" cy="823912"/>
+            <a:off x="6525014" y="2340864"/>
+            <a:ext cx="4443984" cy="823912"/>
           </a:xfrm>
         </p:spPr>
         <p:txBody>
-          <a:bodyPr anchor="b"/>
+          <a:bodyPr anchor="b">
+            <a:noAutofit/>
+          </a:bodyPr>
           <a:lstStyle>
             <a:lvl1pPr marL="0" indent="0">
+              <a:lnSpc>
+                <a:spcPct val="84000"/>
+              </a:lnSpc>
+              <a:spcBef>
+                <a:spcPts val="0"/>
+              </a:spcBef>
+              <a:spcAft>
+                <a:spcPts val="0"/>
+              </a:spcAft>
               <a:buNone/>
-              <a:defRPr sz="2400" b="1"/>
+              <a:defRPr sz="3000" b="0" baseline="0">
+                <a:solidFill>
+                  <a:schemeClr val="tx2"/>
+                </a:solidFill>
+              </a:defRPr>
             </a:lvl1pPr>
             <a:lvl2pPr marL="457200" indent="0">
               <a:buNone/>
@@ -10612,13 +10881,7 @@
       </p:sp>
       <p:sp>
         <p:nvSpPr>
-          <p:cNvPr id="6" name="Объект 5">
-            <a:extLst>
-              <a:ext uri="{FF2B5EF4-FFF2-40B4-BE49-F238E27FC236}">
-                <a16:creationId xmlns:a16="http://schemas.microsoft.com/office/drawing/2014/main" id="{3DC73BAF-3631-4EDC-9B06-8D8BE15BBA3C}"/>
-              </a:ext>
-            </a:extLst>
-          </p:cNvPr>
+          <p:cNvPr id="6" name="Content Placeholder 5"/>
           <p:cNvSpPr>
             <a:spLocks noGrp="1"/>
           </p:cNvSpPr>
@@ -10628,13 +10891,49 @@
         </p:nvSpPr>
         <p:spPr>
           <a:xfrm>
-            <a:off x="6172200" y="2505075"/>
-            <a:ext cx="5183188" cy="3684588"/>
+            <a:off x="6525014" y="3305207"/>
+            <a:ext cx="4443984" cy="2562193"/>
           </a:xfrm>
         </p:spPr>
         <p:txBody>
           <a:bodyPr/>
-          <a:lstStyle/>
+          <a:lstStyle>
+            <a:lvl1pPr>
+              <a:defRPr baseline="0">
+                <a:solidFill>
+                  <a:schemeClr val="tx2"/>
+                </a:solidFill>
+              </a:defRPr>
+            </a:lvl1pPr>
+            <a:lvl2pPr>
+              <a:defRPr baseline="0">
+                <a:solidFill>
+                  <a:schemeClr val="tx2"/>
+                </a:solidFill>
+              </a:defRPr>
+            </a:lvl2pPr>
+            <a:lvl3pPr>
+              <a:defRPr baseline="0">
+                <a:solidFill>
+                  <a:schemeClr val="tx2"/>
+                </a:solidFill>
+              </a:defRPr>
+            </a:lvl3pPr>
+            <a:lvl4pPr>
+              <a:defRPr baseline="0">
+                <a:solidFill>
+                  <a:schemeClr val="tx2"/>
+                </a:solidFill>
+              </a:defRPr>
+            </a:lvl4pPr>
+            <a:lvl5pPr>
+              <a:defRPr baseline="0">
+                <a:solidFill>
+                  <a:schemeClr val="tx2"/>
+                </a:solidFill>
+              </a:defRPr>
+            </a:lvl5pPr>
+          </a:lstStyle>
           <a:p>
             <a:pPr lvl="0"/>
             <a:r>
@@ -10669,18 +10968,13 @@
               <a:rPr lang="ru-RU"/>
               <a:t>Пятый уровень</a:t>
             </a:r>
+            <a:endParaRPr lang="en-US" dirty="0"/>
           </a:p>
         </p:txBody>
       </p:sp>
       <p:sp>
         <p:nvSpPr>
-          <p:cNvPr id="7" name="Дата 6">
-            <a:extLst>
-              <a:ext uri="{FF2B5EF4-FFF2-40B4-BE49-F238E27FC236}">
-                <a16:creationId xmlns:a16="http://schemas.microsoft.com/office/drawing/2014/main" id="{314F62A5-090D-4B45-8947-B283B1A215D4}"/>
-              </a:ext>
-            </a:extLst>
-          </p:cNvPr>
+          <p:cNvPr id="7" name="Date Placeholder 6"/>
           <p:cNvSpPr>
             <a:spLocks noGrp="1"/>
           </p:cNvSpPr>
@@ -10703,13 +10997,7 @@
       </p:sp>
       <p:sp>
         <p:nvSpPr>
-          <p:cNvPr id="8" name="Нижний колонтитул 7">
-            <a:extLst>
-              <a:ext uri="{FF2B5EF4-FFF2-40B4-BE49-F238E27FC236}">
-                <a16:creationId xmlns:a16="http://schemas.microsoft.com/office/drawing/2014/main" id="{D8F6F742-E8C6-4DED-8E2E-317138EA8DED}"/>
-              </a:ext>
-            </a:extLst>
-          </p:cNvPr>
+          <p:cNvPr id="8" name="Footer Placeholder 7"/>
           <p:cNvSpPr>
             <a:spLocks noGrp="1"/>
           </p:cNvSpPr>
@@ -10728,13 +11016,7 @@
       </p:sp>
       <p:sp>
         <p:nvSpPr>
-          <p:cNvPr id="9" name="Номер слайда 8">
-            <a:extLst>
-              <a:ext uri="{FF2B5EF4-FFF2-40B4-BE49-F238E27FC236}">
-                <a16:creationId xmlns:a16="http://schemas.microsoft.com/office/drawing/2014/main" id="{557B40CE-785A-4867-9384-77D618ACF8ED}"/>
-              </a:ext>
-            </a:extLst>
-          </p:cNvPr>
+          <p:cNvPr id="9" name="Slide Number Placeholder 8"/>
           <p:cNvSpPr>
             <a:spLocks noGrp="1"/>
           </p:cNvSpPr>
@@ -10758,7 +11040,7 @@
     </p:spTree>
     <p:extLst>
       <p:ext uri="{BB962C8B-B14F-4D97-AF65-F5344CB8AC3E}">
-        <p14:creationId xmlns:p14="http://schemas.microsoft.com/office/powerpoint/2010/main" val="2190940380"/>
+        <p14:creationId xmlns:p14="http://schemas.microsoft.com/office/powerpoint/2010/main" val="1264296763"/>
       </p:ext>
     </p:extLst>
   </p:cSld>
@@ -10787,13 +11069,7 @@
       </p:grpSpPr>
       <p:sp>
         <p:nvSpPr>
-          <p:cNvPr id="2" name="Заголовок 1">
-            <a:extLst>
-              <a:ext uri="{FF2B5EF4-FFF2-40B4-BE49-F238E27FC236}">
-                <a16:creationId xmlns:a16="http://schemas.microsoft.com/office/drawing/2014/main" id="{11326857-F059-4C17-B2B5-4C6A1A63F816}"/>
-              </a:ext>
-            </a:extLst>
-          </p:cNvPr>
+          <p:cNvPr id="2" name="Title 1"/>
           <p:cNvSpPr>
             <a:spLocks noGrp="1"/>
           </p:cNvSpPr>
@@ -10810,18 +11086,13 @@
               <a:rPr lang="ru-RU"/>
               <a:t>Образец заголовка</a:t>
             </a:r>
+            <a:endParaRPr lang="en-US" dirty="0"/>
           </a:p>
         </p:txBody>
       </p:sp>
       <p:sp>
         <p:nvSpPr>
-          <p:cNvPr id="3" name="Дата 2">
-            <a:extLst>
-              <a:ext uri="{FF2B5EF4-FFF2-40B4-BE49-F238E27FC236}">
-                <a16:creationId xmlns:a16="http://schemas.microsoft.com/office/drawing/2014/main" id="{0AC5579B-560A-4481-A010-09D3C424EAD4}"/>
-              </a:ext>
-            </a:extLst>
-          </p:cNvPr>
+          <p:cNvPr id="3" name="Date Placeholder 2"/>
           <p:cNvSpPr>
             <a:spLocks noGrp="1"/>
           </p:cNvSpPr>
@@ -10844,13 +11115,7 @@
       </p:sp>
       <p:sp>
         <p:nvSpPr>
-          <p:cNvPr id="4" name="Нижний колонтитул 3">
-            <a:extLst>
-              <a:ext uri="{FF2B5EF4-FFF2-40B4-BE49-F238E27FC236}">
-                <a16:creationId xmlns:a16="http://schemas.microsoft.com/office/drawing/2014/main" id="{45591D8C-BF23-44D9-A74D-92C3BCF44A60}"/>
-              </a:ext>
-            </a:extLst>
-          </p:cNvPr>
+          <p:cNvPr id="4" name="Footer Placeholder 3"/>
           <p:cNvSpPr>
             <a:spLocks noGrp="1"/>
           </p:cNvSpPr>
@@ -10869,13 +11134,7 @@
       </p:sp>
       <p:sp>
         <p:nvSpPr>
-          <p:cNvPr id="5" name="Номер слайда 4">
-            <a:extLst>
-              <a:ext uri="{FF2B5EF4-FFF2-40B4-BE49-F238E27FC236}">
-                <a16:creationId xmlns:a16="http://schemas.microsoft.com/office/drawing/2014/main" id="{1B2883EF-219E-4ED5-A0E0-27688DD539B4}"/>
-              </a:ext>
-            </a:extLst>
-          </p:cNvPr>
+          <p:cNvPr id="5" name="Slide Number Placeholder 4"/>
           <p:cNvSpPr>
             <a:spLocks noGrp="1"/>
           </p:cNvSpPr>
@@ -10899,7 +11158,7 @@
     </p:spTree>
     <p:extLst>
       <p:ext uri="{BB962C8B-B14F-4D97-AF65-F5344CB8AC3E}">
-        <p14:creationId xmlns:p14="http://schemas.microsoft.com/office/powerpoint/2010/main" val="1308507229"/>
+        <p14:creationId xmlns:p14="http://schemas.microsoft.com/office/powerpoint/2010/main" val="1026087248"/>
       </p:ext>
     </p:extLst>
   </p:cSld>
@@ -10928,13 +11187,7 @@
       </p:grpSpPr>
       <p:sp>
         <p:nvSpPr>
-          <p:cNvPr id="2" name="Дата 1">
-            <a:extLst>
-              <a:ext uri="{FF2B5EF4-FFF2-40B4-BE49-F238E27FC236}">
-                <a16:creationId xmlns:a16="http://schemas.microsoft.com/office/drawing/2014/main" id="{DADA3D7C-4E07-4EBB-9D8C-4C9E8E178221}"/>
-              </a:ext>
-            </a:extLst>
-          </p:cNvPr>
+          <p:cNvPr id="2" name="Date Placeholder 1"/>
           <p:cNvSpPr>
             <a:spLocks noGrp="1"/>
           </p:cNvSpPr>
@@ -10957,13 +11210,7 @@
       </p:sp>
       <p:sp>
         <p:nvSpPr>
-          <p:cNvPr id="3" name="Нижний колонтитул 2">
-            <a:extLst>
-              <a:ext uri="{FF2B5EF4-FFF2-40B4-BE49-F238E27FC236}">
-                <a16:creationId xmlns:a16="http://schemas.microsoft.com/office/drawing/2014/main" id="{4B6D12C3-E450-4445-8783-AEF15DCD7375}"/>
-              </a:ext>
-            </a:extLst>
-          </p:cNvPr>
+          <p:cNvPr id="3" name="Footer Placeholder 2"/>
           <p:cNvSpPr>
             <a:spLocks noGrp="1"/>
           </p:cNvSpPr>
@@ -10982,13 +11229,7 @@
       </p:sp>
       <p:sp>
         <p:nvSpPr>
-          <p:cNvPr id="4" name="Номер слайда 3">
-            <a:extLst>
-              <a:ext uri="{FF2B5EF4-FFF2-40B4-BE49-F238E27FC236}">
-                <a16:creationId xmlns:a16="http://schemas.microsoft.com/office/drawing/2014/main" id="{003F639C-8652-4F3F-AD26-7E5F03871EF7}"/>
-              </a:ext>
-            </a:extLst>
-          </p:cNvPr>
+          <p:cNvPr id="4" name="Slide Number Placeholder 3"/>
           <p:cNvSpPr>
             <a:spLocks noGrp="1"/>
           </p:cNvSpPr>
@@ -11012,7 +11253,7 @@
     </p:spTree>
     <p:extLst>
       <p:ext uri="{BB962C8B-B14F-4D97-AF65-F5344CB8AC3E}">
-        <p14:creationId xmlns:p14="http://schemas.microsoft.com/office/powerpoint/2010/main" val="1791550295"/>
+        <p14:creationId xmlns:p14="http://schemas.microsoft.com/office/powerpoint/2010/main" val="90503549"/>
       </p:ext>
     </p:extLst>
   </p:cSld>
@@ -11023,7 +11264,7 @@
 </file>
 
 <file path=ppt/slideLayouts/slideLayout8.xml><?xml version="1.0" encoding="utf-8"?>
-<p:sldLayout xmlns:a="http://schemas.openxmlformats.org/drawingml/2006/main" xmlns:r="http://schemas.openxmlformats.org/officeDocument/2006/relationships" xmlns:p="http://schemas.openxmlformats.org/presentationml/2006/main" type="objTx" preserve="1">
+<p:sldLayout xmlns:a="http://schemas.openxmlformats.org/drawingml/2006/main" xmlns:r="http://schemas.openxmlformats.org/officeDocument/2006/relationships" xmlns:p="http://schemas.openxmlformats.org/presentationml/2006/main" showMasterSp="0" type="objTx" preserve="1">
   <p:cSld name="Объект с подписью">
     <p:spTree>
       <p:nvGrpSpPr>
@@ -11041,13 +11282,45 @@
       </p:grpSpPr>
       <p:sp>
         <p:nvSpPr>
-          <p:cNvPr id="2" name="Заголовок 1">
-            <a:extLst>
-              <a:ext uri="{FF2B5EF4-FFF2-40B4-BE49-F238E27FC236}">
-                <a16:creationId xmlns:a16="http://schemas.microsoft.com/office/drawing/2014/main" id="{3C90630D-A1B2-4CB7-903F-87E4220148A7}"/>
-              </a:ext>
-            </a:extLst>
-          </p:cNvPr>
+          <p:cNvPr id="8" name="Rectangle 7" title="Background Shape"/>
+          <p:cNvSpPr/>
+          <p:nvPr/>
+        </p:nvSpPr>
+        <p:spPr>
+          <a:xfrm>
+            <a:off x="0" y="376"/>
+            <a:ext cx="5303520" cy="6857624"/>
+          </a:xfrm>
+          <a:prstGeom prst="rect">
+            <a:avLst/>
+          </a:prstGeom>
+          <a:solidFill>
+            <a:schemeClr val="accent1"/>
+          </a:solidFill>
+          <a:ln>
+            <a:noFill/>
+          </a:ln>
+        </p:spPr>
+        <p:style>
+          <a:lnRef idx="2">
+            <a:schemeClr val="accent1">
+              <a:shade val="50000"/>
+            </a:schemeClr>
+          </a:lnRef>
+          <a:fillRef idx="1">
+            <a:schemeClr val="accent1"/>
+          </a:fillRef>
+          <a:effectRef idx="0">
+            <a:schemeClr val="accent1"/>
+          </a:effectRef>
+          <a:fontRef idx="minor">
+            <a:schemeClr val="lt1"/>
+          </a:fontRef>
+        </p:style>
+      </p:sp>
+      <p:sp>
+        <p:nvSpPr>
+          <p:cNvPr id="2" name="Title 1"/>
           <p:cNvSpPr>
             <a:spLocks noGrp="1"/>
           </p:cNvSpPr>
@@ -11057,15 +11330,24 @@
         </p:nvSpPr>
         <p:spPr>
           <a:xfrm>
-            <a:off x="839788" y="457200"/>
-            <a:ext cx="3932237" cy="1600200"/>
+            <a:off x="723900" y="685800"/>
+            <a:ext cx="3855720" cy="2157884"/>
           </a:xfrm>
         </p:spPr>
         <p:txBody>
-          <a:bodyPr anchor="b"/>
+          <a:bodyPr anchor="t">
+            <a:noAutofit/>
+          </a:bodyPr>
           <a:lstStyle>
             <a:lvl1pPr>
-              <a:defRPr sz="3200"/>
+              <a:lnSpc>
+                <a:spcPct val="84000"/>
+              </a:lnSpc>
+              <a:defRPr sz="4800" baseline="0">
+                <a:solidFill>
+                  <a:schemeClr val="tx2"/>
+                </a:solidFill>
+              </a:defRPr>
             </a:lvl1pPr>
           </a:lstStyle>
           <a:p>
@@ -11073,18 +11355,13 @@
               <a:rPr lang="ru-RU"/>
               <a:t>Образец заголовка</a:t>
             </a:r>
+            <a:endParaRPr lang="en-US" dirty="0"/>
           </a:p>
         </p:txBody>
       </p:sp>
       <p:sp>
         <p:nvSpPr>
-          <p:cNvPr id="3" name="Объект 2">
-            <a:extLst>
-              <a:ext uri="{FF2B5EF4-FFF2-40B4-BE49-F238E27FC236}">
-                <a16:creationId xmlns:a16="http://schemas.microsoft.com/office/drawing/2014/main" id="{BD4A76F4-9C89-4A58-993C-5CF31CE60036}"/>
-              </a:ext>
-            </a:extLst>
-          </p:cNvPr>
+          <p:cNvPr id="3" name="Content Placeholder 2"/>
           <p:cNvSpPr>
             <a:spLocks noGrp="1"/>
           </p:cNvSpPr>
@@ -11094,39 +11371,39 @@
         </p:nvSpPr>
         <p:spPr>
           <a:xfrm>
-            <a:off x="5183188" y="987425"/>
-            <a:ext cx="6172200" cy="4873625"/>
+            <a:off x="6256020" y="685801"/>
+            <a:ext cx="5212080" cy="5175250"/>
           </a:xfrm>
         </p:spPr>
         <p:txBody>
           <a:bodyPr/>
           <a:lstStyle>
             <a:lvl1pPr>
-              <a:defRPr sz="3200"/>
+              <a:defRPr sz="2000"/>
             </a:lvl1pPr>
             <a:lvl2pPr>
-              <a:defRPr sz="2800"/>
+              <a:defRPr sz="2000"/>
             </a:lvl2pPr>
             <a:lvl3pPr>
-              <a:defRPr sz="2400"/>
+              <a:defRPr sz="1800"/>
             </a:lvl3pPr>
             <a:lvl4pPr>
-              <a:defRPr sz="2000"/>
+              <a:defRPr sz="1800"/>
             </a:lvl4pPr>
             <a:lvl5pPr>
-              <a:defRPr sz="2000"/>
+              <a:defRPr sz="1600"/>
             </a:lvl5pPr>
             <a:lvl6pPr>
-              <a:defRPr sz="2000"/>
+              <a:defRPr sz="1600"/>
             </a:lvl6pPr>
             <a:lvl7pPr>
-              <a:defRPr sz="2000"/>
+              <a:defRPr sz="1600"/>
             </a:lvl7pPr>
             <a:lvl8pPr>
-              <a:defRPr sz="2000"/>
+              <a:defRPr sz="1600"/>
             </a:lvl8pPr>
             <a:lvl9pPr>
-              <a:defRPr sz="2000"/>
+              <a:defRPr sz="1600"/>
             </a:lvl9pPr>
           </a:lstStyle>
           <a:p>
@@ -11163,18 +11440,13 @@
               <a:rPr lang="ru-RU"/>
               <a:t>Пятый уровень</a:t>
             </a:r>
+            <a:endParaRPr lang="en-US" dirty="0"/>
           </a:p>
         </p:txBody>
       </p:sp>
       <p:sp>
         <p:nvSpPr>
-          <p:cNvPr id="4" name="Текст 3">
-            <a:extLst>
-              <a:ext uri="{FF2B5EF4-FFF2-40B4-BE49-F238E27FC236}">
-                <a16:creationId xmlns:a16="http://schemas.microsoft.com/office/drawing/2014/main" id="{5C32DEE4-D5AD-4BB0-9F0D-FCC0737DB177}"/>
-              </a:ext>
-            </a:extLst>
-          </p:cNvPr>
+          <p:cNvPr id="4" name="Text Placeholder 3"/>
           <p:cNvSpPr>
             <a:spLocks noGrp="1"/>
           </p:cNvSpPr>
@@ -11184,14 +11456,23 @@
         </p:nvSpPr>
         <p:spPr>
           <a:xfrm>
-            <a:off x="839788" y="2057400"/>
-            <a:ext cx="3932237" cy="3811588"/>
+            <a:off x="723900" y="2856344"/>
+            <a:ext cx="3855720" cy="3011056"/>
           </a:xfrm>
         </p:spPr>
         <p:txBody>
           <a:bodyPr/>
           <a:lstStyle>
             <a:lvl1pPr marL="0" indent="0">
+              <a:lnSpc>
+                <a:spcPct val="113000"/>
+              </a:lnSpc>
+              <a:spcBef>
+                <a:spcPts val="0"/>
+              </a:spcBef>
+              <a:spcAft>
+                <a:spcPts val="1500"/>
+              </a:spcAft>
               <a:buNone/>
               <a:defRPr sz="1600"/>
             </a:lvl1pPr>
@@ -11239,13 +11520,7 @@
       </p:sp>
       <p:sp>
         <p:nvSpPr>
-          <p:cNvPr id="5" name="Дата 4">
-            <a:extLst>
-              <a:ext uri="{FF2B5EF4-FFF2-40B4-BE49-F238E27FC236}">
-                <a16:creationId xmlns:a16="http://schemas.microsoft.com/office/drawing/2014/main" id="{D3C97039-31CD-422B-AE29-07AACA05DB38}"/>
-              </a:ext>
-            </a:extLst>
-          </p:cNvPr>
+          <p:cNvPr id="5" name="Date Placeholder 4"/>
           <p:cNvSpPr>
             <a:spLocks noGrp="1"/>
           </p:cNvSpPr>
@@ -11253,10 +11528,23 @@
             <p:ph type="dt" sz="half" idx="10"/>
           </p:nvPr>
         </p:nvSpPr>
-        <p:spPr/>
+        <p:spPr>
+          <a:xfrm>
+            <a:off x="723900" y="6453386"/>
+            <a:ext cx="1204572" cy="404614"/>
+          </a:xfrm>
+        </p:spPr>
         <p:txBody>
           <a:bodyPr/>
-          <a:lstStyle/>
+          <a:lstStyle>
+            <a:lvl1pPr>
+              <a:defRPr>
+                <a:solidFill>
+                  <a:schemeClr val="tx2"/>
+                </a:solidFill>
+              </a:defRPr>
+            </a:lvl1pPr>
+          </a:lstStyle>
           <a:p>
             <a:fld id="{8C24B0F7-C30C-415F-A326-7645160ABE3D}" type="datetimeFigureOut">
               <a:rPr lang="ru-RU" smtClean="0"/>
@@ -11268,13 +11556,7 @@
       </p:sp>
       <p:sp>
         <p:nvSpPr>
-          <p:cNvPr id="6" name="Нижний колонтитул 5">
-            <a:extLst>
-              <a:ext uri="{FF2B5EF4-FFF2-40B4-BE49-F238E27FC236}">
-                <a16:creationId xmlns:a16="http://schemas.microsoft.com/office/drawing/2014/main" id="{968AB0BC-2C1A-404C-908B-1EEA79B1CBA3}"/>
-              </a:ext>
-            </a:extLst>
-          </p:cNvPr>
+          <p:cNvPr id="6" name="Footer Placeholder 5"/>
           <p:cNvSpPr>
             <a:spLocks noGrp="1"/>
           </p:cNvSpPr>
@@ -11282,10 +11564,23 @@
             <p:ph type="ftr" sz="quarter" idx="11"/>
           </p:nvPr>
         </p:nvSpPr>
-        <p:spPr/>
+        <p:spPr>
+          <a:xfrm>
+            <a:off x="2205945" y="6453386"/>
+            <a:ext cx="2373675" cy="404614"/>
+          </a:xfrm>
+        </p:spPr>
         <p:txBody>
           <a:bodyPr/>
-          <a:lstStyle/>
+          <a:lstStyle>
+            <a:lvl1pPr>
+              <a:defRPr>
+                <a:solidFill>
+                  <a:schemeClr val="tx2"/>
+                </a:solidFill>
+              </a:defRPr>
+            </a:lvl1pPr>
+          </a:lstStyle>
           <a:p>
             <a:endParaRPr lang="ru-RU"/>
           </a:p>
@@ -11293,13 +11588,7 @@
       </p:sp>
       <p:sp>
         <p:nvSpPr>
-          <p:cNvPr id="7" name="Номер слайда 6">
-            <a:extLst>
-              <a:ext uri="{FF2B5EF4-FFF2-40B4-BE49-F238E27FC236}">
-                <a16:creationId xmlns:a16="http://schemas.microsoft.com/office/drawing/2014/main" id="{973FA06C-DB84-4164-AB2A-B584C5C1ADAF}"/>
-              </a:ext>
-            </a:extLst>
-          </p:cNvPr>
+          <p:cNvPr id="7" name="Slide Number Placeholder 6"/>
           <p:cNvSpPr>
             <a:spLocks noGrp="1"/>
           </p:cNvSpPr>
@@ -11307,10 +11596,23 @@
             <p:ph type="sldNum" sz="quarter" idx="12"/>
           </p:nvPr>
         </p:nvSpPr>
-        <p:spPr/>
+        <p:spPr>
+          <a:xfrm>
+            <a:off x="9883140" y="6453386"/>
+            <a:ext cx="1596292" cy="404614"/>
+          </a:xfrm>
+        </p:spPr>
         <p:txBody>
           <a:bodyPr/>
-          <a:lstStyle/>
+          <a:lstStyle>
+            <a:lvl1pPr>
+              <a:defRPr>
+                <a:solidFill>
+                  <a:schemeClr val="tx2"/>
+                </a:solidFill>
+              </a:defRPr>
+            </a:lvl1pPr>
+          </a:lstStyle>
           <a:p>
             <a:fld id="{DC350E1C-3855-4554-9870-5D464E1CD647}" type="slidenum">
               <a:rPr lang="ru-RU" smtClean="0"/>
@@ -11320,10 +11622,48 @@
           </a:p>
         </p:txBody>
       </p:sp>
+      <p:sp>
+        <p:nvSpPr>
+          <p:cNvPr id="9" name="Rectangle 8" title="Divider Bar"/>
+          <p:cNvSpPr/>
+          <p:nvPr/>
+        </p:nvSpPr>
+        <p:spPr>
+          <a:xfrm>
+            <a:off x="5303520" y="376"/>
+            <a:ext cx="228600" cy="6858000"/>
+          </a:xfrm>
+          <a:prstGeom prst="rect">
+            <a:avLst/>
+          </a:prstGeom>
+          <a:solidFill>
+            <a:schemeClr val="tx2"/>
+          </a:solidFill>
+          <a:ln>
+            <a:noFill/>
+          </a:ln>
+        </p:spPr>
+        <p:style>
+          <a:lnRef idx="2">
+            <a:schemeClr val="accent1">
+              <a:shade val="50000"/>
+            </a:schemeClr>
+          </a:lnRef>
+          <a:fillRef idx="1">
+            <a:schemeClr val="accent1"/>
+          </a:fillRef>
+          <a:effectRef idx="0">
+            <a:schemeClr val="accent1"/>
+          </a:effectRef>
+          <a:fontRef idx="minor">
+            <a:schemeClr val="lt1"/>
+          </a:fontRef>
+        </p:style>
+      </p:sp>
     </p:spTree>
     <p:extLst>
       <p:ext uri="{BB962C8B-B14F-4D97-AF65-F5344CB8AC3E}">
-        <p14:creationId xmlns:p14="http://schemas.microsoft.com/office/powerpoint/2010/main" val="1630423045"/>
+        <p14:creationId xmlns:p14="http://schemas.microsoft.com/office/powerpoint/2010/main" val="3686422389"/>
       </p:ext>
     </p:extLst>
   </p:cSld>
@@ -11334,7 +11674,7 @@
 </file>
 
 <file path=ppt/slideLayouts/slideLayout9.xml><?xml version="1.0" encoding="utf-8"?>
-<p:sldLayout xmlns:a="http://schemas.openxmlformats.org/drawingml/2006/main" xmlns:r="http://schemas.openxmlformats.org/officeDocument/2006/relationships" xmlns:p="http://schemas.openxmlformats.org/presentationml/2006/main" type="picTx" preserve="1">
+<p:sldLayout xmlns:a="http://schemas.openxmlformats.org/drawingml/2006/main" xmlns:r="http://schemas.openxmlformats.org/officeDocument/2006/relationships" xmlns:p="http://schemas.openxmlformats.org/presentationml/2006/main" showMasterSp="0" type="picTx" preserve="1">
   <p:cSld name="Рисунок с подписью">
     <p:spTree>
       <p:nvGrpSpPr>
@@ -11352,13 +11692,45 @@
       </p:grpSpPr>
       <p:sp>
         <p:nvSpPr>
-          <p:cNvPr id="2" name="Заголовок 1">
-            <a:extLst>
-              <a:ext uri="{FF2B5EF4-FFF2-40B4-BE49-F238E27FC236}">
-                <a16:creationId xmlns:a16="http://schemas.microsoft.com/office/drawing/2014/main" id="{0D345C12-FEE4-488C-9A14-6C9D28ACC193}"/>
-              </a:ext>
-            </a:extLst>
-          </p:cNvPr>
+          <p:cNvPr id="8" name="Rectangle 7" title="Background Shape"/>
+          <p:cNvSpPr/>
+          <p:nvPr/>
+        </p:nvSpPr>
+        <p:spPr>
+          <a:xfrm>
+            <a:off x="0" y="376"/>
+            <a:ext cx="5303520" cy="6857624"/>
+          </a:xfrm>
+          <a:prstGeom prst="rect">
+            <a:avLst/>
+          </a:prstGeom>
+          <a:solidFill>
+            <a:schemeClr val="accent1"/>
+          </a:solidFill>
+          <a:ln>
+            <a:noFill/>
+          </a:ln>
+        </p:spPr>
+        <p:style>
+          <a:lnRef idx="2">
+            <a:schemeClr val="accent1">
+              <a:shade val="50000"/>
+            </a:schemeClr>
+          </a:lnRef>
+          <a:fillRef idx="1">
+            <a:schemeClr val="accent1"/>
+          </a:fillRef>
+          <a:effectRef idx="0">
+            <a:schemeClr val="accent1"/>
+          </a:effectRef>
+          <a:fontRef idx="minor">
+            <a:schemeClr val="lt1"/>
+          </a:fontRef>
+        </p:style>
+      </p:sp>
+      <p:sp>
+        <p:nvSpPr>
+          <p:cNvPr id="2" name="Title 1"/>
           <p:cNvSpPr>
             <a:spLocks noGrp="1"/>
           </p:cNvSpPr>
@@ -11368,15 +11740,20 @@
         </p:nvSpPr>
         <p:spPr>
           <a:xfrm>
-            <a:off x="839788" y="457200"/>
-            <a:ext cx="3932237" cy="1600200"/>
+            <a:off x="723900" y="685800"/>
+            <a:ext cx="3855720" cy="2157884"/>
           </a:xfrm>
         </p:spPr>
         <p:txBody>
-          <a:bodyPr anchor="b"/>
+          <a:bodyPr anchor="t">
+            <a:normAutofit/>
+          </a:bodyPr>
           <a:lstStyle>
             <a:lvl1pPr>
-              <a:defRPr sz="3200"/>
+              <a:lnSpc>
+                <a:spcPct val="84000"/>
+              </a:lnSpc>
+              <a:defRPr sz="4800" baseline="0"/>
             </a:lvl1pPr>
           </a:lstStyle>
           <a:p>
@@ -11384,20 +11761,15 @@
               <a:rPr lang="ru-RU"/>
               <a:t>Образец заголовка</a:t>
             </a:r>
+            <a:endParaRPr lang="en-US" dirty="0"/>
           </a:p>
         </p:txBody>
       </p:sp>
       <p:sp>
         <p:nvSpPr>
-          <p:cNvPr id="3" name="Рисунок 2">
-            <a:extLst>
-              <a:ext uri="{FF2B5EF4-FFF2-40B4-BE49-F238E27FC236}">
-                <a16:creationId xmlns:a16="http://schemas.microsoft.com/office/drawing/2014/main" id="{41C6EB27-A40E-4B3F-92FD-6DF5953196DA}"/>
-              </a:ext>
-            </a:extLst>
-          </p:cNvPr>
+          <p:cNvPr id="3" name="Picture Placeholder 2"/>
           <p:cNvSpPr>
-            <a:spLocks noGrp="1"/>
+            <a:spLocks noGrp="1" noChangeAspect="1"/>
           </p:cNvSpPr>
           <p:nvPr>
             <p:ph type="pic" idx="1"/>
@@ -11405,24 +11777,26 @@
         </p:nvSpPr>
         <p:spPr>
           <a:xfrm>
-            <a:off x="5183188" y="987425"/>
-            <a:ext cx="6172200" cy="4873625"/>
+            <a:off x="5532120" y="0"/>
+            <a:ext cx="6659880" cy="6857999"/>
           </a:xfrm>
         </p:spPr>
         <p:txBody>
-          <a:bodyPr/>
+          <a:bodyPr anchor="t">
+            <a:normAutofit/>
+          </a:bodyPr>
           <a:lstStyle>
             <a:lvl1pPr marL="0" indent="0">
               <a:buNone/>
-              <a:defRPr sz="3200"/>
+              <a:defRPr sz="2000"/>
             </a:lvl1pPr>
             <a:lvl2pPr marL="457200" indent="0">
               <a:buNone/>
-              <a:defRPr sz="2800"/>
+              <a:defRPr sz="2000"/>
             </a:lvl2pPr>
             <a:lvl3pPr marL="914400" indent="0">
               <a:buNone/>
-              <a:defRPr sz="2400"/>
+              <a:defRPr sz="2000"/>
             </a:lvl3pPr>
             <a:lvl4pPr marL="1371600" indent="0">
               <a:buNone/>
@@ -11450,19 +11824,17 @@
             </a:lvl9pPr>
           </a:lstStyle>
           <a:p>
-            <a:endParaRPr lang="ru-RU"/>
+            <a:r>
+              <a:rPr lang="ru-RU"/>
+              <a:t>Вставка рисунка</a:t>
+            </a:r>
+            <a:endParaRPr lang="en-US" dirty="0"/>
           </a:p>
         </p:txBody>
       </p:sp>
       <p:sp>
         <p:nvSpPr>
-          <p:cNvPr id="4" name="Текст 3">
-            <a:extLst>
-              <a:ext uri="{FF2B5EF4-FFF2-40B4-BE49-F238E27FC236}">
-                <a16:creationId xmlns:a16="http://schemas.microsoft.com/office/drawing/2014/main" id="{7A4F51A8-A2ED-4137-9316-CB50846FEF05}"/>
-              </a:ext>
-            </a:extLst>
-          </p:cNvPr>
+          <p:cNvPr id="4" name="Text Placeholder 3"/>
           <p:cNvSpPr>
             <a:spLocks noGrp="1"/>
           </p:cNvSpPr>
@@ -11472,14 +11844,23 @@
         </p:nvSpPr>
         <p:spPr>
           <a:xfrm>
-            <a:off x="839788" y="2057400"/>
-            <a:ext cx="3932237" cy="3811588"/>
+            <a:off x="723900" y="2855968"/>
+            <a:ext cx="3855720" cy="3011432"/>
           </a:xfrm>
         </p:spPr>
         <p:txBody>
           <a:bodyPr/>
           <a:lstStyle>
             <a:lvl1pPr marL="0" indent="0">
+              <a:lnSpc>
+                <a:spcPct val="113000"/>
+              </a:lnSpc>
+              <a:spcBef>
+                <a:spcPts val="0"/>
+              </a:spcBef>
+              <a:spcAft>
+                <a:spcPts val="1500"/>
+              </a:spcAft>
               <a:buNone/>
               <a:defRPr sz="1600"/>
             </a:lvl1pPr>
@@ -11527,13 +11908,7 @@
       </p:sp>
       <p:sp>
         <p:nvSpPr>
-          <p:cNvPr id="5" name="Дата 4">
-            <a:extLst>
-              <a:ext uri="{FF2B5EF4-FFF2-40B4-BE49-F238E27FC236}">
-                <a16:creationId xmlns:a16="http://schemas.microsoft.com/office/drawing/2014/main" id="{E4008A3E-E424-4B41-9CAA-8FAFF88F67FA}"/>
-              </a:ext>
-            </a:extLst>
-          </p:cNvPr>
+          <p:cNvPr id="5" name="Date Placeholder 4"/>
           <p:cNvSpPr>
             <a:spLocks noGrp="1"/>
           </p:cNvSpPr>
@@ -11541,10 +11916,23 @@
             <p:ph type="dt" sz="half" idx="10"/>
           </p:nvPr>
         </p:nvSpPr>
-        <p:spPr/>
+        <p:spPr>
+          <a:xfrm>
+            <a:off x="723900" y="6453386"/>
+            <a:ext cx="1204572" cy="404614"/>
+          </a:xfrm>
+        </p:spPr>
         <p:txBody>
           <a:bodyPr/>
-          <a:lstStyle/>
+          <a:lstStyle>
+            <a:lvl1pPr>
+              <a:defRPr>
+                <a:solidFill>
+                  <a:schemeClr val="tx2"/>
+                </a:solidFill>
+              </a:defRPr>
+            </a:lvl1pPr>
+          </a:lstStyle>
           <a:p>
             <a:fld id="{8C24B0F7-C30C-415F-A326-7645160ABE3D}" type="datetimeFigureOut">
               <a:rPr lang="ru-RU" smtClean="0"/>
@@ -11556,13 +11944,7 @@
       </p:sp>
       <p:sp>
         <p:nvSpPr>
-          <p:cNvPr id="6" name="Нижний колонтитул 5">
-            <a:extLst>
-              <a:ext uri="{FF2B5EF4-FFF2-40B4-BE49-F238E27FC236}">
-                <a16:creationId xmlns:a16="http://schemas.microsoft.com/office/drawing/2014/main" id="{9E965C9F-7325-479A-9D2E-7A83D05C19DE}"/>
-              </a:ext>
-            </a:extLst>
-          </p:cNvPr>
+          <p:cNvPr id="6" name="Footer Placeholder 5"/>
           <p:cNvSpPr>
             <a:spLocks noGrp="1"/>
           </p:cNvSpPr>
@@ -11570,24 +11952,31 @@
             <p:ph type="ftr" sz="quarter" idx="11"/>
           </p:nvPr>
         </p:nvSpPr>
-        <p:spPr/>
+        <p:spPr>
+          <a:xfrm>
+            <a:off x="2205945" y="6453386"/>
+            <a:ext cx="2373675" cy="404614"/>
+          </a:xfrm>
+        </p:spPr>
         <p:txBody>
           <a:bodyPr/>
-          <a:lstStyle/>
+          <a:lstStyle>
+            <a:lvl1pPr>
+              <a:defRPr>
+                <a:solidFill>
+                  <a:schemeClr val="tx2"/>
+                </a:solidFill>
+              </a:defRPr>
+            </a:lvl1pPr>
+          </a:lstStyle>
           <a:p>
-            <a:endParaRPr lang="ru-RU"/>
+            <a:endParaRPr lang="en-US" dirty="0"/>
           </a:p>
         </p:txBody>
       </p:sp>
       <p:sp>
         <p:nvSpPr>
-          <p:cNvPr id="7" name="Номер слайда 6">
-            <a:extLst>
-              <a:ext uri="{FF2B5EF4-FFF2-40B4-BE49-F238E27FC236}">
-                <a16:creationId xmlns:a16="http://schemas.microsoft.com/office/drawing/2014/main" id="{9BDAF0A1-16CB-42A6-82FF-B10F8A6090C8}"/>
-              </a:ext>
-            </a:extLst>
-          </p:cNvPr>
+          <p:cNvPr id="7" name="Slide Number Placeholder 6"/>
           <p:cNvSpPr>
             <a:spLocks noGrp="1"/>
           </p:cNvSpPr>
@@ -11595,10 +11984,23 @@
             <p:ph type="sldNum" sz="quarter" idx="12"/>
           </p:nvPr>
         </p:nvSpPr>
-        <p:spPr/>
+        <p:spPr>
+          <a:xfrm>
+            <a:off x="9883140" y="6453386"/>
+            <a:ext cx="1596292" cy="404614"/>
+          </a:xfrm>
+        </p:spPr>
         <p:txBody>
           <a:bodyPr/>
-          <a:lstStyle/>
+          <a:lstStyle>
+            <a:lvl1pPr>
+              <a:defRPr>
+                <a:solidFill>
+                  <a:schemeClr val="tx2"/>
+                </a:solidFill>
+              </a:defRPr>
+            </a:lvl1pPr>
+          </a:lstStyle>
           <a:p>
             <a:fld id="{DC350E1C-3855-4554-9870-5D464E1CD647}" type="slidenum">
               <a:rPr lang="ru-RU" smtClean="0"/>
@@ -11608,10 +12010,48 @@
           </a:p>
         </p:txBody>
       </p:sp>
+      <p:sp>
+        <p:nvSpPr>
+          <p:cNvPr id="9" name="Rectangle 8" title="Divider Bar"/>
+          <p:cNvSpPr/>
+          <p:nvPr/>
+        </p:nvSpPr>
+        <p:spPr>
+          <a:xfrm>
+            <a:off x="5303520" y="376"/>
+            <a:ext cx="228600" cy="6858000"/>
+          </a:xfrm>
+          <a:prstGeom prst="rect">
+            <a:avLst/>
+          </a:prstGeom>
+          <a:solidFill>
+            <a:schemeClr val="tx2"/>
+          </a:solidFill>
+          <a:ln>
+            <a:noFill/>
+          </a:ln>
+        </p:spPr>
+        <p:style>
+          <a:lnRef idx="2">
+            <a:schemeClr val="accent1">
+              <a:shade val="50000"/>
+            </a:schemeClr>
+          </a:lnRef>
+          <a:fillRef idx="1">
+            <a:schemeClr val="accent1"/>
+          </a:fillRef>
+          <a:effectRef idx="0">
+            <a:schemeClr val="accent1"/>
+          </a:effectRef>
+          <a:fontRef idx="minor">
+            <a:schemeClr val="lt1"/>
+          </a:fontRef>
+        </p:style>
+      </p:sp>
     </p:spTree>
     <p:extLst>
       <p:ext uri="{BB962C8B-B14F-4D97-AF65-F5344CB8AC3E}">
-        <p14:creationId xmlns:p14="http://schemas.microsoft.com/office/powerpoint/2010/main" val="1113215253"/>
+        <p14:creationId xmlns:p14="http://schemas.microsoft.com/office/powerpoint/2010/main" val="1609306707"/>
       </p:ext>
     </p:extLst>
   </p:cSld>
@@ -11625,9 +12065,12 @@
 <p:sldMaster xmlns:a="http://schemas.openxmlformats.org/drawingml/2006/main" xmlns:r="http://schemas.openxmlformats.org/officeDocument/2006/relationships" xmlns:p="http://schemas.openxmlformats.org/presentationml/2006/main">
   <p:cSld>
     <p:bg>
-      <p:bgRef idx="1001">
-        <a:schemeClr val="bg1"/>
-      </p:bgRef>
+      <p:bgPr>
+        <a:solidFill>
+          <a:schemeClr val="bg2"/>
+        </a:solidFill>
+        <a:effectLst/>
+      </p:bgPr>
     </p:bg>
     <p:spTree>
       <p:nvGrpSpPr>
@@ -11645,13 +12088,7 @@
       </p:grpSpPr>
       <p:sp>
         <p:nvSpPr>
-          <p:cNvPr id="2" name="Заголовок 1">
-            <a:extLst>
-              <a:ext uri="{FF2B5EF4-FFF2-40B4-BE49-F238E27FC236}">
-                <a16:creationId xmlns:a16="http://schemas.microsoft.com/office/drawing/2014/main" id="{80E94DD0-988C-4D04-91EB-378923BED23C}"/>
-              </a:ext>
-            </a:extLst>
-          </p:cNvPr>
+          <p:cNvPr id="2" name="Title Placeholder 1"/>
           <p:cNvSpPr>
             <a:spLocks noGrp="1"/>
           </p:cNvSpPr>
@@ -11661,15 +12098,15 @@
         </p:nvSpPr>
         <p:spPr>
           <a:xfrm>
-            <a:off x="838200" y="365125"/>
-            <a:ext cx="10515600" cy="1325563"/>
+            <a:off x="1371600" y="685800"/>
+            <a:ext cx="9601200" cy="1485900"/>
           </a:xfrm>
           <a:prstGeom prst="rect">
             <a:avLst/>
           </a:prstGeom>
         </p:spPr>
         <p:txBody>
-          <a:bodyPr vert="horz" lIns="91440" tIns="45720" rIns="91440" bIns="45720" rtlCol="0" anchor="ctr">
+          <a:bodyPr vert="horz" lIns="91440" tIns="45720" rIns="91440" bIns="45720" rtlCol="0" anchor="t">
             <a:normAutofit/>
           </a:bodyPr>
           <a:lstStyle/>
@@ -11678,18 +12115,13 @@
               <a:rPr lang="ru-RU"/>
               <a:t>Образец заголовка</a:t>
             </a:r>
+            <a:endParaRPr lang="en-US" dirty="0"/>
           </a:p>
         </p:txBody>
       </p:sp>
       <p:sp>
         <p:nvSpPr>
-          <p:cNvPr id="3" name="Текст 2">
-            <a:extLst>
-              <a:ext uri="{FF2B5EF4-FFF2-40B4-BE49-F238E27FC236}">
-                <a16:creationId xmlns:a16="http://schemas.microsoft.com/office/drawing/2014/main" id="{A6F5F137-C088-4975-A467-672861AD2250}"/>
-              </a:ext>
-            </a:extLst>
-          </p:cNvPr>
+          <p:cNvPr id="3" name="Text Placeholder 2"/>
           <p:cNvSpPr>
             <a:spLocks noGrp="1"/>
           </p:cNvSpPr>
@@ -11699,8 +12131,8 @@
         </p:nvSpPr>
         <p:spPr>
           <a:xfrm>
-            <a:off x="838200" y="1825625"/>
-            <a:ext cx="10515600" cy="4351338"/>
+            <a:off x="1371600" y="2286000"/>
+            <a:ext cx="9601200" cy="3581400"/>
           </a:xfrm>
           <a:prstGeom prst="rect">
             <a:avLst/>
@@ -11745,18 +12177,13 @@
               <a:rPr lang="ru-RU"/>
               <a:t>Пятый уровень</a:t>
             </a:r>
+            <a:endParaRPr lang="en-US" dirty="0"/>
           </a:p>
         </p:txBody>
       </p:sp>
       <p:sp>
         <p:nvSpPr>
-          <p:cNvPr id="4" name="Дата 3">
-            <a:extLst>
-              <a:ext uri="{FF2B5EF4-FFF2-40B4-BE49-F238E27FC236}">
-                <a16:creationId xmlns:a16="http://schemas.microsoft.com/office/drawing/2014/main" id="{F118FCCF-9DEC-40DB-80E6-9951987C059A}"/>
-              </a:ext>
-            </a:extLst>
-          </p:cNvPr>
+          <p:cNvPr id="4" name="Date Placeholder 3"/>
           <p:cNvSpPr>
             <a:spLocks noGrp="1"/>
           </p:cNvSpPr>
@@ -11766,8 +12193,8 @@
         </p:nvSpPr>
         <p:spPr>
           <a:xfrm>
-            <a:off x="838200" y="6356350"/>
-            <a:ext cx="2743200" cy="365125"/>
+            <a:off x="1390650" y="6453386"/>
+            <a:ext cx="1204572" cy="404614"/>
           </a:xfrm>
           <a:prstGeom prst="rect">
             <a:avLst/>
@@ -11777,11 +12204,9 @@
           <a:bodyPr vert="horz" lIns="91440" tIns="45720" rIns="91440" bIns="45720" rtlCol="0" anchor="ctr"/>
           <a:lstStyle>
             <a:lvl1pPr algn="l">
-              <a:defRPr sz="1200">
+              <a:defRPr sz="1200" baseline="0">
                 <a:solidFill>
-                  <a:schemeClr val="tx1">
-                    <a:tint val="75000"/>
-                  </a:schemeClr>
+                  <a:schemeClr val="tx2"/>
                 </a:solidFill>
               </a:defRPr>
             </a:lvl1pPr>
@@ -11797,13 +12222,7 @@
       </p:sp>
       <p:sp>
         <p:nvSpPr>
-          <p:cNvPr id="5" name="Нижний колонтитул 4">
-            <a:extLst>
-              <a:ext uri="{FF2B5EF4-FFF2-40B4-BE49-F238E27FC236}">
-                <a16:creationId xmlns:a16="http://schemas.microsoft.com/office/drawing/2014/main" id="{9A512E8D-6CEC-499A-A773-0D97AA38B2B6}"/>
-              </a:ext>
-            </a:extLst>
-          </p:cNvPr>
+          <p:cNvPr id="5" name="Footer Placeholder 4"/>
           <p:cNvSpPr>
             <a:spLocks noGrp="1"/>
           </p:cNvSpPr>
@@ -11813,8 +12232,8 @@
         </p:nvSpPr>
         <p:spPr>
           <a:xfrm>
-            <a:off x="4038600" y="6356350"/>
-            <a:ext cx="4114800" cy="365125"/>
+            <a:off x="2893564" y="6453386"/>
+            <a:ext cx="6280830" cy="404614"/>
           </a:xfrm>
           <a:prstGeom prst="rect">
             <a:avLst/>
@@ -11823,12 +12242,10 @@
         <p:txBody>
           <a:bodyPr vert="horz" lIns="91440" tIns="45720" rIns="91440" bIns="45720" rtlCol="0" anchor="ctr"/>
           <a:lstStyle>
-            <a:lvl1pPr algn="ctr">
-              <a:defRPr sz="1200">
+            <a:lvl1pPr algn="l">
+              <a:defRPr sz="1200" baseline="0">
                 <a:solidFill>
-                  <a:schemeClr val="tx1">
-                    <a:tint val="75000"/>
-                  </a:schemeClr>
+                  <a:schemeClr val="tx2"/>
                 </a:solidFill>
               </a:defRPr>
             </a:lvl1pPr>
@@ -11840,13 +12257,7 @@
       </p:sp>
       <p:sp>
         <p:nvSpPr>
-          <p:cNvPr id="6" name="Номер слайда 5">
-            <a:extLst>
-              <a:ext uri="{FF2B5EF4-FFF2-40B4-BE49-F238E27FC236}">
-                <a16:creationId xmlns:a16="http://schemas.microsoft.com/office/drawing/2014/main" id="{67046036-089B-4F88-9FEF-F58126FF09C7}"/>
-              </a:ext>
-            </a:extLst>
-          </p:cNvPr>
+          <p:cNvPr id="6" name="Slide Number Placeholder 5"/>
           <p:cNvSpPr>
             <a:spLocks noGrp="1"/>
           </p:cNvSpPr>
@@ -11856,8 +12267,8 @@
         </p:nvSpPr>
         <p:spPr>
           <a:xfrm>
-            <a:off x="8610600" y="6356350"/>
-            <a:ext cx="2743200" cy="365125"/>
+            <a:off x="9472736" y="6453386"/>
+            <a:ext cx="1596292" cy="404614"/>
           </a:xfrm>
           <a:prstGeom prst="rect">
             <a:avLst/>
@@ -11867,11 +12278,9 @@
           <a:bodyPr vert="horz" lIns="91440" tIns="45720" rIns="91440" bIns="45720" rtlCol="0" anchor="ctr"/>
           <a:lstStyle>
             <a:lvl1pPr algn="r">
-              <a:defRPr sz="1200">
+              <a:defRPr sz="1200" baseline="0">
                 <a:solidFill>
-                  <a:schemeClr val="tx1">
-                    <a:tint val="75000"/>
-                  </a:schemeClr>
+                  <a:schemeClr val="tx2"/>
                 </a:solidFill>
               </a:defRPr>
             </a:lvl1pPr>
@@ -11885,40 +12294,78 @@
           </a:p>
         </p:txBody>
       </p:sp>
+      <p:sp>
+        <p:nvSpPr>
+          <p:cNvPr id="9" name="Rectangle 8" title="Side bar"/>
+          <p:cNvSpPr/>
+          <p:nvPr/>
+        </p:nvSpPr>
+        <p:spPr>
+          <a:xfrm>
+            <a:off x="478095" y="376"/>
+            <a:ext cx="228600" cy="6858000"/>
+          </a:xfrm>
+          <a:prstGeom prst="rect">
+            <a:avLst/>
+          </a:prstGeom>
+          <a:solidFill>
+            <a:schemeClr val="tx2"/>
+          </a:solidFill>
+          <a:ln>
+            <a:noFill/>
+          </a:ln>
+        </p:spPr>
+        <p:style>
+          <a:lnRef idx="2">
+            <a:schemeClr val="accent1">
+              <a:shade val="50000"/>
+            </a:schemeClr>
+          </a:lnRef>
+          <a:fillRef idx="1">
+            <a:schemeClr val="accent1"/>
+          </a:fillRef>
+          <a:effectRef idx="0">
+            <a:schemeClr val="accent1"/>
+          </a:effectRef>
+          <a:fontRef idx="minor">
+            <a:schemeClr val="lt1"/>
+          </a:fontRef>
+        </p:style>
+      </p:sp>
     </p:spTree>
     <p:extLst>
       <p:ext uri="{BB962C8B-B14F-4D97-AF65-F5344CB8AC3E}">
-        <p14:creationId xmlns:p14="http://schemas.microsoft.com/office/powerpoint/2010/main" val="4285428197"/>
+        <p14:creationId xmlns:p14="http://schemas.microsoft.com/office/powerpoint/2010/main" val="4280151578"/>
       </p:ext>
     </p:extLst>
   </p:cSld>
   <p:clrMap bg1="lt1" tx1="dk1" bg2="lt2" tx2="dk2" accent1="accent1" accent2="accent2" accent3="accent3" accent4="accent4" accent5="accent5" accent6="accent6" hlink="hlink" folHlink="folHlink"/>
   <p:sldLayoutIdLst>
-    <p:sldLayoutId id="2147483649" r:id="rId1"/>
-    <p:sldLayoutId id="2147483650" r:id="rId2"/>
-    <p:sldLayoutId id="2147483651" r:id="rId3"/>
-    <p:sldLayoutId id="2147483652" r:id="rId4"/>
-    <p:sldLayoutId id="2147483653" r:id="rId5"/>
-    <p:sldLayoutId id="2147483654" r:id="rId6"/>
-    <p:sldLayoutId id="2147483655" r:id="rId7"/>
-    <p:sldLayoutId id="2147483656" r:id="rId8"/>
-    <p:sldLayoutId id="2147483657" r:id="rId9"/>
-    <p:sldLayoutId id="2147483658" r:id="rId10"/>
-    <p:sldLayoutId id="2147483659" r:id="rId11"/>
+    <p:sldLayoutId id="2147483961" r:id="rId1"/>
+    <p:sldLayoutId id="2147483962" r:id="rId2"/>
+    <p:sldLayoutId id="2147483963" r:id="rId3"/>
+    <p:sldLayoutId id="2147483964" r:id="rId4"/>
+    <p:sldLayoutId id="2147483965" r:id="rId5"/>
+    <p:sldLayoutId id="2147483966" r:id="rId6"/>
+    <p:sldLayoutId id="2147483967" r:id="rId7"/>
+    <p:sldLayoutId id="2147483968" r:id="rId8"/>
+    <p:sldLayoutId id="2147483969" r:id="rId9"/>
+    <p:sldLayoutId id="2147483970" r:id="rId10"/>
+    <p:sldLayoutId id="2147483971" r:id="rId11"/>
   </p:sldLayoutIdLst>
   <p:txStyles>
     <p:titleStyle>
       <a:lvl1pPr algn="l" defTabSz="914400" rtl="0" eaLnBrk="1" latinLnBrk="0" hangingPunct="1">
         <a:lnSpc>
-          <a:spcPct val="90000"/>
+          <a:spcPct val="89000"/>
         </a:lnSpc>
         <a:spcBef>
           <a:spcPct val="0"/>
         </a:spcBef>
         <a:buNone/>
-        <a:defRPr sz="4400" kern="1200">
+        <a:defRPr sz="4400" kern="1200" baseline="0">
           <a:solidFill>
-            <a:schemeClr val="tx1"/>
+            <a:schemeClr val="tx2"/>
           </a:solidFill>
           <a:latin typeface="+mj-lt"/>
           <a:ea typeface="+mj-ea"/>
@@ -11927,162 +12374,189 @@
       </a:lvl1pPr>
     </p:titleStyle>
     <p:bodyStyle>
-      <a:lvl1pPr marL="228600" indent="-228600" algn="l" defTabSz="914400" rtl="0" eaLnBrk="1" latinLnBrk="0" hangingPunct="1">
+      <a:lvl1pPr marL="384048" indent="-384048" algn="l" defTabSz="914400" rtl="0" eaLnBrk="1" latinLnBrk="0" hangingPunct="1">
         <a:lnSpc>
-          <a:spcPct val="90000"/>
+          <a:spcPct val="94000"/>
         </a:lnSpc>
         <a:spcBef>
           <a:spcPts val="1000"/>
         </a:spcBef>
-        <a:buFont typeface="Arial" panose="020B0604020202020204" pitchFamily="34" charset="0"/>
-        <a:buChar char="•"/>
-        <a:defRPr sz="2800" kern="1200">
+        <a:spcAft>
+          <a:spcPts val="200"/>
+        </a:spcAft>
+        <a:buFont typeface="Franklin Gothic Book" panose="020B0503020102020204" pitchFamily="34" charset="0"/>
+        <a:buChar char="■"/>
+        <a:defRPr sz="2000" kern="1200" baseline="0">
           <a:solidFill>
-            <a:schemeClr val="tx1"/>
+            <a:schemeClr val="tx2"/>
           </a:solidFill>
           <a:latin typeface="+mn-lt"/>
           <a:ea typeface="+mn-ea"/>
           <a:cs typeface="+mn-cs"/>
         </a:defRPr>
       </a:lvl1pPr>
-      <a:lvl2pPr marL="685800" indent="-228600" algn="l" defTabSz="914400" rtl="0" eaLnBrk="1" latinLnBrk="0" hangingPunct="1">
+      <a:lvl2pPr marL="914400" indent="-384048" algn="l" defTabSz="914400" rtl="0" eaLnBrk="1" latinLnBrk="0" hangingPunct="1">
         <a:lnSpc>
-          <a:spcPct val="90000"/>
+          <a:spcPct val="94000"/>
         </a:lnSpc>
         <a:spcBef>
           <a:spcPts val="500"/>
         </a:spcBef>
-        <a:buFont typeface="Arial" panose="020B0604020202020204" pitchFamily="34" charset="0"/>
-        <a:buChar char="•"/>
-        <a:defRPr sz="2400" kern="1200">
+        <a:spcAft>
+          <a:spcPts val="200"/>
+        </a:spcAft>
+        <a:buFont typeface="Franklin Gothic Book" panose="020B0503020102020204" pitchFamily="34" charset="0"/>
+        <a:buChar char="–"/>
+        <a:defRPr sz="2000" i="1" kern="1200" baseline="0">
           <a:solidFill>
-            <a:schemeClr val="tx1"/>
+            <a:schemeClr val="tx2"/>
           </a:solidFill>
           <a:latin typeface="+mn-lt"/>
           <a:ea typeface="+mn-ea"/>
           <a:cs typeface="+mn-cs"/>
         </a:defRPr>
       </a:lvl2pPr>
-      <a:lvl3pPr marL="1143000" indent="-228600" algn="l" defTabSz="914400" rtl="0" eaLnBrk="1" latinLnBrk="0" hangingPunct="1">
+      <a:lvl3pPr marL="1371600" indent="-384048" algn="l" defTabSz="914400" rtl="0" eaLnBrk="1" latinLnBrk="0" hangingPunct="1">
         <a:lnSpc>
-          <a:spcPct val="90000"/>
+          <a:spcPct val="94000"/>
         </a:lnSpc>
         <a:spcBef>
           <a:spcPts val="500"/>
         </a:spcBef>
-        <a:buFont typeface="Arial" panose="020B0604020202020204" pitchFamily="34" charset="0"/>
-        <a:buChar char="•"/>
-        <a:defRPr sz="2000" kern="1200">
+        <a:spcAft>
+          <a:spcPts val="200"/>
+        </a:spcAft>
+        <a:buFont typeface="Franklin Gothic Book" panose="020B0503020102020204" pitchFamily="34" charset="0"/>
+        <a:buChar char="■"/>
+        <a:defRPr sz="1800" kern="1200" baseline="0">
           <a:solidFill>
-            <a:schemeClr val="tx1"/>
+            <a:schemeClr val="tx2"/>
           </a:solidFill>
           <a:latin typeface="+mn-lt"/>
           <a:ea typeface="+mn-ea"/>
           <a:cs typeface="+mn-cs"/>
         </a:defRPr>
       </a:lvl3pPr>
-      <a:lvl4pPr marL="1600200" indent="-228600" algn="l" defTabSz="914400" rtl="0" eaLnBrk="1" latinLnBrk="0" hangingPunct="1">
+      <a:lvl4pPr marL="1828800" indent="-384048" algn="l" defTabSz="914400" rtl="0" eaLnBrk="1" latinLnBrk="0" hangingPunct="1">
         <a:lnSpc>
-          <a:spcPct val="90000"/>
+          <a:spcPct val="94000"/>
         </a:lnSpc>
         <a:spcBef>
           <a:spcPts val="500"/>
         </a:spcBef>
-        <a:buFont typeface="Arial" panose="020B0604020202020204" pitchFamily="34" charset="0"/>
-        <a:buChar char="•"/>
-        <a:defRPr sz="1800" kern="1200">
+        <a:spcAft>
+          <a:spcPts val="200"/>
+        </a:spcAft>
+        <a:buFont typeface="Franklin Gothic Book" panose="020B0503020102020204" pitchFamily="34" charset="0"/>
+        <a:buChar char="–"/>
+        <a:defRPr sz="1800" i="1" kern="1200" baseline="0">
           <a:solidFill>
-            <a:schemeClr val="tx1"/>
+            <a:schemeClr val="tx2"/>
           </a:solidFill>
           <a:latin typeface="+mn-lt"/>
           <a:ea typeface="+mn-ea"/>
           <a:cs typeface="+mn-cs"/>
         </a:defRPr>
       </a:lvl4pPr>
-      <a:lvl5pPr marL="2057400" indent="-228600" algn="l" defTabSz="914400" rtl="0" eaLnBrk="1" latinLnBrk="0" hangingPunct="1">
+      <a:lvl5pPr marL="2286000" indent="-384048" algn="l" defTabSz="914400" rtl="0" eaLnBrk="1" latinLnBrk="0" hangingPunct="1">
         <a:lnSpc>
-          <a:spcPct val="90000"/>
+          <a:spcPct val="94000"/>
         </a:lnSpc>
         <a:spcBef>
           <a:spcPts val="500"/>
         </a:spcBef>
-        <a:buFont typeface="Arial" panose="020B0604020202020204" pitchFamily="34" charset="0"/>
-        <a:buChar char="•"/>
-        <a:defRPr sz="1800" kern="1200">
+        <a:spcAft>
+          <a:spcPts val="200"/>
+        </a:spcAft>
+        <a:buFont typeface="Franklin Gothic Book" panose="020B0503020102020204" pitchFamily="34" charset="0"/>
+        <a:buChar char="■"/>
+        <a:defRPr sz="1600" kern="1200" baseline="0">
           <a:solidFill>
-            <a:schemeClr val="tx1"/>
+            <a:schemeClr val="tx2"/>
           </a:solidFill>
           <a:latin typeface="+mn-lt"/>
           <a:ea typeface="+mn-ea"/>
           <a:cs typeface="+mn-cs"/>
         </a:defRPr>
       </a:lvl5pPr>
-      <a:lvl6pPr marL="2514600" indent="-228600" algn="l" defTabSz="914400" rtl="0" eaLnBrk="1" latinLnBrk="0" hangingPunct="1">
+      <a:lvl6pPr marL="2743200" indent="-384048" algn="l" defTabSz="914400" rtl="0" eaLnBrk="1" latinLnBrk="0" hangingPunct="1">
         <a:lnSpc>
-          <a:spcPct val="90000"/>
+          <a:spcPct val="94000"/>
         </a:lnSpc>
         <a:spcBef>
           <a:spcPts val="500"/>
         </a:spcBef>
-        <a:buFont typeface="Arial" panose="020B0604020202020204" pitchFamily="34" charset="0"/>
-        <a:buChar char="•"/>
-        <a:defRPr sz="1800" kern="1200">
+        <a:spcAft>
+          <a:spcPts val="200"/>
+        </a:spcAft>
+        <a:buFont typeface="Franklin Gothic Book" panose="020B0503020102020204" pitchFamily="34" charset="0"/>
+        <a:buChar char="–"/>
+        <a:defRPr sz="1600" i="1" kern="1200" baseline="0">
           <a:solidFill>
-            <a:schemeClr val="tx1"/>
+            <a:schemeClr val="tx2"/>
           </a:solidFill>
           <a:latin typeface="+mn-lt"/>
           <a:ea typeface="+mn-ea"/>
           <a:cs typeface="+mn-cs"/>
         </a:defRPr>
       </a:lvl6pPr>
-      <a:lvl7pPr marL="2971800" indent="-228600" algn="l" defTabSz="914400" rtl="0" eaLnBrk="1" latinLnBrk="0" hangingPunct="1">
+      <a:lvl7pPr marL="3200400" indent="-384048" algn="l" defTabSz="914400" rtl="0" eaLnBrk="1" latinLnBrk="0" hangingPunct="1">
         <a:lnSpc>
-          <a:spcPct val="90000"/>
+          <a:spcPct val="94000"/>
         </a:lnSpc>
         <a:spcBef>
           <a:spcPts val="500"/>
         </a:spcBef>
-        <a:buFont typeface="Arial" panose="020B0604020202020204" pitchFamily="34" charset="0"/>
-        <a:buChar char="•"/>
-        <a:defRPr sz="1800" kern="1200">
+        <a:spcAft>
+          <a:spcPts val="200"/>
+        </a:spcAft>
+        <a:buFont typeface="Franklin Gothic Book" panose="020B0503020102020204" pitchFamily="34" charset="0"/>
+        <a:buChar char="■"/>
+        <a:defRPr sz="1400" kern="1200" baseline="0">
           <a:solidFill>
-            <a:schemeClr val="tx1"/>
+            <a:schemeClr val="tx2"/>
           </a:solidFill>
           <a:latin typeface="+mn-lt"/>
           <a:ea typeface="+mn-ea"/>
           <a:cs typeface="+mn-cs"/>
         </a:defRPr>
       </a:lvl7pPr>
-      <a:lvl8pPr marL="3429000" indent="-228600" algn="l" defTabSz="914400" rtl="0" eaLnBrk="1" latinLnBrk="0" hangingPunct="1">
+      <a:lvl8pPr marL="3657600" indent="-384048" algn="l" defTabSz="914400" rtl="0" eaLnBrk="1" latinLnBrk="0" hangingPunct="1">
         <a:lnSpc>
-          <a:spcPct val="90000"/>
+          <a:spcPct val="94000"/>
         </a:lnSpc>
         <a:spcBef>
           <a:spcPts val="500"/>
         </a:spcBef>
-        <a:buFont typeface="Arial" panose="020B0604020202020204" pitchFamily="34" charset="0"/>
-        <a:buChar char="•"/>
-        <a:defRPr sz="1800" kern="1200">
+        <a:spcAft>
+          <a:spcPts val="200"/>
+        </a:spcAft>
+        <a:buFont typeface="Franklin Gothic Book" panose="020B0503020102020204" pitchFamily="34" charset="0"/>
+        <a:buChar char="–"/>
+        <a:defRPr sz="1400" i="1" kern="1200" baseline="0">
           <a:solidFill>
-            <a:schemeClr val="tx1"/>
+            <a:schemeClr val="tx2"/>
           </a:solidFill>
           <a:latin typeface="+mn-lt"/>
           <a:ea typeface="+mn-ea"/>
           <a:cs typeface="+mn-cs"/>
         </a:defRPr>
       </a:lvl8pPr>
-      <a:lvl9pPr marL="3886200" indent="-228600" algn="l" defTabSz="914400" rtl="0" eaLnBrk="1" latinLnBrk="0" hangingPunct="1">
+      <a:lvl9pPr marL="4114800" indent="-384048" algn="l" defTabSz="914400" rtl="0" eaLnBrk="1" latinLnBrk="0" hangingPunct="1">
         <a:lnSpc>
-          <a:spcPct val="90000"/>
+          <a:spcPct val="94000"/>
         </a:lnSpc>
         <a:spcBef>
           <a:spcPts val="500"/>
         </a:spcBef>
-        <a:buFont typeface="Arial" panose="020B0604020202020204" pitchFamily="34" charset="0"/>
-        <a:buChar char="•"/>
-        <a:defRPr sz="1800" kern="1200">
+        <a:spcAft>
+          <a:spcPts val="200"/>
+        </a:spcAft>
+        <a:buFont typeface="Franklin Gothic Book" panose="020B0503020102020204" pitchFamily="34" charset="0"/>
+        <a:buChar char="■"/>
+        <a:defRPr sz="1400" kern="1200" baseline="0">
           <a:solidFill>
-            <a:schemeClr val="tx1"/>
+            <a:schemeClr val="tx2"/>
           </a:solidFill>
           <a:latin typeface="+mn-lt"/>
           <a:ea typeface="+mn-ea"/>
@@ -12092,7 +12566,7 @@
     </p:bodyStyle>
     <p:otherStyle>
       <a:defPPr>
-        <a:defRPr lang="ru-RU"/>
+        <a:defRPr lang="en-US"/>
       </a:defPPr>
       <a:lvl1pPr marL="0" algn="l" defTabSz="914400" rtl="0" eaLnBrk="1" latinLnBrk="0" hangingPunct="1">
         <a:defRPr sz="1800" kern="1200">
@@ -12186,6 +12660,52 @@
       </a:lvl9pPr>
     </p:otherStyle>
   </p:txStyles>
+  <p:extLst>
+    <p:ext uri="{27BBF7A9-308A-43DC-89C8-2F10F3537804}">
+      <p15:sldGuideLst xmlns:p15="http://schemas.microsoft.com/office/powerpoint/2012/main">
+        <p15:guide id="3" orient="horz" pos="1368">
+          <p15:clr>
+            <a:srgbClr val="F26B43"/>
+          </p15:clr>
+        </p15:guide>
+        <p15:guide id="4" orient="horz" pos="1440">
+          <p15:clr>
+            <a:srgbClr val="F26B43"/>
+          </p15:clr>
+        </p15:guide>
+        <p15:guide id="6" orient="horz" pos="3696">
+          <p15:clr>
+            <a:srgbClr val="F26B43"/>
+          </p15:clr>
+        </p15:guide>
+        <p15:guide id="7" orient="horz" pos="432">
+          <p15:clr>
+            <a:srgbClr val="F26B43"/>
+          </p15:clr>
+        </p15:guide>
+        <p15:guide id="8" orient="horz" pos="1512">
+          <p15:clr>
+            <a:srgbClr val="F26B43"/>
+          </p15:clr>
+        </p15:guide>
+        <p15:guide id="9" pos="6912">
+          <p15:clr>
+            <a:srgbClr val="F26B43"/>
+          </p15:clr>
+        </p15:guide>
+        <p15:guide id="10" pos="936">
+          <p15:clr>
+            <a:srgbClr val="F26B43"/>
+          </p15:clr>
+        </p15:guide>
+        <p15:guide id="11" pos="864">
+          <p15:clr>
+            <a:srgbClr val="F26B43"/>
+          </p15:clr>
+        </p15:guide>
+      </p15:sldGuideLst>
+    </p:ext>
+  </p:extLst>
 </p:sldMaster>
 </file>
 
@@ -12602,8 +13122,8 @@
         </p:nvSpPr>
         <p:spPr>
           <a:xfrm>
-            <a:off x="838200" y="365125"/>
-            <a:ext cx="6208059" cy="1325563"/>
+            <a:off x="838201" y="365125"/>
+            <a:ext cx="5257799" cy="1325563"/>
           </a:xfrm>
         </p:spPr>
         <p:txBody>
@@ -12962,7 +13482,7 @@
         <p:spPr>
           <a:xfrm>
             <a:off x="0" y="0"/>
-            <a:ext cx="10515600" cy="923365"/>
+            <a:ext cx="11779624" cy="923365"/>
           </a:xfrm>
         </p:spPr>
         <p:txBody>
@@ -13006,13 +13526,13 @@
         </p:nvSpPr>
         <p:spPr>
           <a:xfrm>
-            <a:off x="161360" y="1004047"/>
+            <a:off x="5755337" y="1004048"/>
             <a:ext cx="6436663" cy="5853952"/>
           </a:xfrm>
         </p:spPr>
         <p:txBody>
           <a:bodyPr>
-            <a:normAutofit/>
+            <a:normAutofit lnSpcReduction="10000"/>
           </a:bodyPr>
           <a:lstStyle/>
           <a:p>
@@ -13261,14 +13781,14 @@
           <p:nvPr>
             <p:extLst>
               <p:ext uri="{D42A27DB-BD31-4B8C-83A1-F6EECF244321}">
-                <p14:modId xmlns:p14="http://schemas.microsoft.com/office/powerpoint/2010/main" val="2906537416"/>
+                <p14:modId xmlns:p14="http://schemas.microsoft.com/office/powerpoint/2010/main" val="2555954376"/>
               </p:ext>
             </p:extLst>
           </p:nvPr>
         </p:nvGraphicFramePr>
         <p:xfrm>
-          <a:off x="6526307" y="1359158"/>
-          <a:ext cx="5504332" cy="4139683"/>
+          <a:off x="161366" y="1654993"/>
+          <a:ext cx="5432611" cy="4139683"/>
         </p:xfrm>
         <a:graphic>
           <a:graphicData uri="http://schemas.openxmlformats.org/drawingml/2006/table">
@@ -13277,28 +13797,28 @@
                 <a:tableStyleId>{1FECB4D8-DB02-4DC6-A0A2-4F2EBAE1DC90}</a:tableStyleId>
               </a:tblPr>
               <a:tblGrid>
-                <a:gridCol w="2145550">
+                <a:gridCol w="2117594">
                   <a:extLst>
                     <a:ext uri="{9D8B030D-6E8A-4147-A177-3AD203B41FA5}">
                       <a16:colId xmlns:a16="http://schemas.microsoft.com/office/drawing/2014/main" val="3853787819"/>
                     </a:ext>
                   </a:extLst>
                 </a:gridCol>
-                <a:gridCol w="1152596">
+                <a:gridCol w="1137577">
                   <a:extLst>
                     <a:ext uri="{9D8B030D-6E8A-4147-A177-3AD203B41FA5}">
                       <a16:colId xmlns:a16="http://schemas.microsoft.com/office/drawing/2014/main" val="319069690"/>
                     </a:ext>
                   </a:extLst>
                 </a:gridCol>
-                <a:gridCol w="1188562">
+                <a:gridCol w="1173075">
                   <a:extLst>
                     <a:ext uri="{9D8B030D-6E8A-4147-A177-3AD203B41FA5}">
                       <a16:colId xmlns:a16="http://schemas.microsoft.com/office/drawing/2014/main" val="3783521288"/>
                     </a:ext>
                   </a:extLst>
                 </a:gridCol>
-                <a:gridCol w="1017624">
+                <a:gridCol w="1004365">
                   <a:extLst>
                     <a:ext uri="{9D8B030D-6E8A-4147-A177-3AD203B41FA5}">
                       <a16:colId xmlns:a16="http://schemas.microsoft.com/office/drawing/2014/main" val="1595587826"/>
@@ -14017,7 +14537,7 @@
         <p:spPr/>
         <p:txBody>
           <a:bodyPr>
-            <a:normAutofit/>
+            <a:normAutofit fontScale="85000" lnSpcReduction="20000"/>
           </a:bodyPr>
           <a:lstStyle/>
           <a:p>
@@ -14168,13 +14688,13 @@
           <p:nvPr>
             <p:extLst>
               <p:ext uri="{D42A27DB-BD31-4B8C-83A1-F6EECF244321}">
-                <p14:modId xmlns:p14="http://schemas.microsoft.com/office/powerpoint/2010/main" val="904723973"/>
+                <p14:modId xmlns:p14="http://schemas.microsoft.com/office/powerpoint/2010/main" val="3561322947"/>
               </p:ext>
             </p:extLst>
           </p:nvPr>
         </p:nvGraphicFramePr>
         <p:xfrm>
-          <a:off x="5842972" y="89647"/>
+          <a:off x="6255349" y="174812"/>
           <a:ext cx="5444042" cy="3429000"/>
         </p:xfrm>
         <a:graphic>
@@ -14198,13 +14718,13 @@
           <p:nvPr>
             <p:extLst>
               <p:ext uri="{D42A27DB-BD31-4B8C-83A1-F6EECF244321}">
-                <p14:modId xmlns:p14="http://schemas.microsoft.com/office/powerpoint/2010/main" val="3485880554"/>
+                <p14:modId xmlns:p14="http://schemas.microsoft.com/office/powerpoint/2010/main" val="3130927315"/>
               </p:ext>
             </p:extLst>
           </p:nvPr>
         </p:nvGraphicFramePr>
         <p:xfrm>
-          <a:off x="398930" y="89647"/>
+          <a:off x="811307" y="174812"/>
           <a:ext cx="5444042" cy="3429000"/>
         </p:xfrm>
         <a:graphic>
@@ -14228,13 +14748,13 @@
           <p:nvPr>
             <p:extLst>
               <p:ext uri="{D42A27DB-BD31-4B8C-83A1-F6EECF244321}">
-                <p14:modId xmlns:p14="http://schemas.microsoft.com/office/powerpoint/2010/main" val="3052037472"/>
+                <p14:modId xmlns:p14="http://schemas.microsoft.com/office/powerpoint/2010/main" val="3047528513"/>
               </p:ext>
             </p:extLst>
           </p:nvPr>
         </p:nvGraphicFramePr>
         <p:xfrm>
-          <a:off x="479613" y="3688977"/>
+          <a:off x="891990" y="3731559"/>
           <a:ext cx="10807401" cy="1227079"/>
         </p:xfrm>
         <a:graphic>
@@ -14315,9 +14835,7 @@
                       <a:headEnd type="none" w="med" len="med"/>
                       <a:tailEnd type="none" w="med" len="med"/>
                     </a:lnB>
-                    <a:solidFill>
-                      <a:schemeClr val="bg1"/>
-                    </a:solidFill>
+                    <a:noFill/>
                   </a:tcPr>
                 </a:tc>
                 <a:tc>
@@ -14376,9 +14894,7 @@
                       <a:headEnd type="none" w="med" len="med"/>
                       <a:tailEnd type="none" w="med" len="med"/>
                     </a:lnB>
-                    <a:solidFill>
-                      <a:schemeClr val="bg1"/>
-                    </a:solidFill>
+                    <a:noFill/>
                   </a:tcPr>
                 </a:tc>
                 <a:tc>
@@ -14437,9 +14953,7 @@
                       <a:headEnd type="none" w="med" len="med"/>
                       <a:tailEnd type="none" w="med" len="med"/>
                     </a:lnB>
-                    <a:solidFill>
-                      <a:schemeClr val="bg1"/>
-                    </a:solidFill>
+                    <a:noFill/>
                   </a:tcPr>
                 </a:tc>
                 <a:extLst>
@@ -14502,9 +15016,7 @@
                       <a:headEnd type="none" w="med" len="med"/>
                       <a:tailEnd type="none" w="med" len="med"/>
                     </a:lnB>
-                    <a:solidFill>
-                      <a:schemeClr val="bg1"/>
-                    </a:solidFill>
+                    <a:noFill/>
                   </a:tcPr>
                 </a:tc>
                 <a:tc>
@@ -14513,7 +15025,7 @@
                     <a:lstStyle/>
                     <a:p>
                       <a:r>
-                        <a:rPr lang="ru-RU" sz="1600">
+                        <a:rPr lang="ru-RU" sz="1600" dirty="0">
                           <a:effectLst/>
                         </a:rPr>
                         <a:t>Плавная возрастающая кривая</a:t>
@@ -14557,9 +15069,7 @@
                       <a:headEnd type="none" w="med" len="med"/>
                       <a:tailEnd type="none" w="med" len="med"/>
                     </a:lnB>
-                    <a:solidFill>
-                      <a:schemeClr val="bg1"/>
-                    </a:solidFill>
+                    <a:noFill/>
                   </a:tcPr>
                 </a:tc>
                 <a:tc>
@@ -14606,9 +15116,7 @@
                       <a:headEnd type="none" w="med" len="med"/>
                       <a:tailEnd type="none" w="med" len="med"/>
                     </a:lnB>
-                    <a:solidFill>
-                      <a:schemeClr val="bg1"/>
-                    </a:solidFill>
+                    <a:noFill/>
                   </a:tcPr>
                 </a:tc>
                 <a:extLst>
@@ -14671,9 +15179,7 @@
                       <a:headEnd type="none" w="med" len="med"/>
                       <a:tailEnd type="none" w="med" len="med"/>
                     </a:lnB>
-                    <a:solidFill>
-                      <a:schemeClr val="bg1"/>
-                    </a:solidFill>
+                    <a:noFill/>
                   </a:tcPr>
                 </a:tc>
                 <a:tc>
@@ -14726,9 +15232,7 @@
                       <a:headEnd type="none" w="med" len="med"/>
                       <a:tailEnd type="none" w="med" len="med"/>
                     </a:lnB>
-                    <a:solidFill>
-                      <a:schemeClr val="bg1"/>
-                    </a:solidFill>
+                    <a:noFill/>
                   </a:tcPr>
                 </a:tc>
                 <a:tc>
@@ -14787,9 +15291,7 @@
                       <a:headEnd type="none" w="med" len="med"/>
                       <a:tailEnd type="none" w="med" len="med"/>
                     </a:lnB>
-                    <a:solidFill>
-                      <a:schemeClr val="bg1"/>
-                    </a:solidFill>
+                    <a:noFill/>
                   </a:tcPr>
                 </a:tc>
                 <a:extLst>
@@ -14816,7 +15318,7 @@
         </p:nvSpPr>
         <p:spPr>
           <a:xfrm>
-            <a:off x="398930" y="5086386"/>
+            <a:off x="811307" y="5086385"/>
             <a:ext cx="10888084" cy="923330"/>
           </a:xfrm>
           <a:prstGeom prst="rect">
@@ -15155,7 +15657,7 @@
             <p:ph idx="1"/>
             <p:extLst>
               <p:ext uri="{D42A27DB-BD31-4B8C-83A1-F6EECF244321}">
-                <p14:modId xmlns:p14="http://schemas.microsoft.com/office/powerpoint/2010/main" val="513459940"/>
+                <p14:modId xmlns:p14="http://schemas.microsoft.com/office/powerpoint/2010/main" val="289672434"/>
               </p:ext>
             </p:extLst>
           </p:nvPr>
@@ -15236,9 +15738,7 @@
                       <a:headEnd type="none" w="med" len="med"/>
                       <a:tailEnd type="none" w="med" len="med"/>
                     </a:lnB>
-                    <a:solidFill>
-                      <a:schemeClr val="bg1"/>
-                    </a:solidFill>
+                    <a:noFill/>
                   </a:tcPr>
                 </a:tc>
                 <a:tc>
@@ -15299,9 +15799,7 @@
                       <a:headEnd type="none" w="med" len="med"/>
                       <a:tailEnd type="none" w="med" len="med"/>
                     </a:lnB>
-                    <a:solidFill>
-                      <a:schemeClr val="bg1"/>
-                    </a:solidFill>
+                    <a:noFill/>
                   </a:tcPr>
                 </a:tc>
                 <a:extLst>
@@ -15364,9 +15862,7 @@
                       <a:headEnd type="none" w="med" len="med"/>
                       <a:tailEnd type="none" w="med" len="med"/>
                     </a:lnB>
-                    <a:solidFill>
-                      <a:schemeClr val="bg1"/>
-                    </a:solidFill>
+                    <a:noFill/>
                   </a:tcPr>
                 </a:tc>
                 <a:tc>
@@ -15454,9 +15950,7 @@
                       <a:headEnd type="none" w="med" len="med"/>
                       <a:tailEnd type="none" w="med" len="med"/>
                     </a:lnB>
-                    <a:solidFill>
-                      <a:schemeClr val="bg1"/>
-                    </a:solidFill>
+                    <a:noFill/>
                   </a:tcPr>
                 </a:tc>
                 <a:extLst>
@@ -15519,9 +16013,7 @@
                       <a:headEnd type="none" w="med" len="med"/>
                       <a:tailEnd type="none" w="med" len="med"/>
                     </a:lnB>
-                    <a:solidFill>
-                      <a:schemeClr val="bg1"/>
-                    </a:solidFill>
+                    <a:noFill/>
                   </a:tcPr>
                 </a:tc>
                 <a:tc>
@@ -15568,9 +16060,7 @@
                       <a:headEnd type="none" w="med" len="med"/>
                       <a:tailEnd type="none" w="med" len="med"/>
                     </a:lnB>
-                    <a:solidFill>
-                      <a:schemeClr val="bg1"/>
-                    </a:solidFill>
+                    <a:noFill/>
                   </a:tcPr>
                 </a:tc>
                 <a:extLst>
@@ -15633,9 +16123,7 @@
                       <a:headEnd type="none" w="med" len="med"/>
                       <a:tailEnd type="none" w="med" len="med"/>
                     </a:lnB>
-                    <a:solidFill>
-                      <a:schemeClr val="bg1"/>
-                    </a:solidFill>
+                    <a:noFill/>
                   </a:tcPr>
                 </a:tc>
                 <a:tc>
@@ -15694,9 +16182,7 @@
                       <a:headEnd type="none" w="med" len="med"/>
                       <a:tailEnd type="none" w="med" len="med"/>
                     </a:lnB>
-                    <a:solidFill>
-                      <a:schemeClr val="bg1"/>
-                    </a:solidFill>
+                    <a:noFill/>
                   </a:tcPr>
                 </a:tc>
                 <a:extLst>
@@ -15753,9 +16239,7 @@
                     <a:lnB>
                       <a:noFill/>
                     </a:lnB>
-                    <a:solidFill>
-                      <a:schemeClr val="bg1"/>
-                    </a:solidFill>
+                    <a:noFill/>
                   </a:tcPr>
                 </a:tc>
                 <a:tc>
@@ -15796,9 +16280,7 @@
                     <a:lnB>
                       <a:noFill/>
                     </a:lnB>
-                    <a:solidFill>
-                      <a:schemeClr val="bg1"/>
-                    </a:solidFill>
+                    <a:noFill/>
                   </a:tcPr>
                 </a:tc>
                 <a:extLst>
@@ -15826,7 +16308,7 @@
           <p:nvPr>
             <p:extLst>
               <p:ext uri="{D42A27DB-BD31-4B8C-83A1-F6EECF244321}">
-                <p14:modId xmlns:p14="http://schemas.microsoft.com/office/powerpoint/2010/main" val="2108704356"/>
+                <p14:modId xmlns:p14="http://schemas.microsoft.com/office/powerpoint/2010/main" val="976812421"/>
               </p:ext>
             </p:extLst>
           </p:nvPr>
@@ -15907,9 +16389,7 @@
                       <a:headEnd type="none" w="med" len="med"/>
                       <a:tailEnd type="none" w="med" len="med"/>
                     </a:lnB>
-                    <a:solidFill>
-                      <a:schemeClr val="bg1"/>
-                    </a:solidFill>
+                    <a:noFill/>
                   </a:tcPr>
                 </a:tc>
                 <a:tc>
@@ -15953,9 +16433,7 @@
                       <a:headEnd type="none" w="med" len="med"/>
                       <a:tailEnd type="none" w="med" len="med"/>
                     </a:lnB>
-                    <a:solidFill>
-                      <a:schemeClr val="bg1"/>
-                    </a:solidFill>
+                    <a:noFill/>
                   </a:tcPr>
                 </a:tc>
                 <a:extLst>
@@ -16018,9 +16496,7 @@
                       <a:headEnd type="none" w="med" len="med"/>
                       <a:tailEnd type="none" w="med" len="med"/>
                     </a:lnB>
-                    <a:solidFill>
-                      <a:schemeClr val="bg1"/>
-                    </a:solidFill>
+                    <a:noFill/>
                   </a:tcPr>
                 </a:tc>
                 <a:tc>
@@ -16067,9 +16543,7 @@
                       <a:headEnd type="none" w="med" len="med"/>
                       <a:tailEnd type="none" w="med" len="med"/>
                     </a:lnB>
-                    <a:solidFill>
-                      <a:schemeClr val="bg1"/>
-                    </a:solidFill>
+                    <a:noFill/>
                   </a:tcPr>
                 </a:tc>
                 <a:extLst>
@@ -16132,9 +16606,7 @@
                       <a:headEnd type="none" w="med" len="med"/>
                       <a:tailEnd type="none" w="med" len="med"/>
                     </a:lnB>
-                    <a:solidFill>
-                      <a:schemeClr val="bg1"/>
-                    </a:solidFill>
+                    <a:noFill/>
                   </a:tcPr>
                 </a:tc>
                 <a:tc>
@@ -16193,9 +16665,7 @@
                       <a:headEnd type="none" w="med" len="med"/>
                       <a:tailEnd type="none" w="med" len="med"/>
                     </a:lnB>
-                    <a:solidFill>
-                      <a:schemeClr val="bg1"/>
-                    </a:solidFill>
+                    <a:noFill/>
                   </a:tcPr>
                 </a:tc>
                 <a:extLst>
@@ -16258,9 +16728,7 @@
                       <a:headEnd type="none" w="med" len="med"/>
                       <a:tailEnd type="none" w="med" len="med"/>
                     </a:lnB>
-                    <a:solidFill>
-                      <a:schemeClr val="bg1"/>
-                    </a:solidFill>
+                    <a:noFill/>
                   </a:tcPr>
                 </a:tc>
                 <a:tc>
@@ -16325,9 +16793,7 @@
                       <a:headEnd type="none" w="med" len="med"/>
                       <a:tailEnd type="none" w="med" len="med"/>
                     </a:lnB>
-                    <a:solidFill>
-                      <a:schemeClr val="bg1"/>
-                    </a:solidFill>
+                    <a:noFill/>
                   </a:tcPr>
                 </a:tc>
                 <a:extLst>
@@ -16384,9 +16850,7 @@
                     <a:lnB>
                       <a:noFill/>
                     </a:lnB>
-                    <a:solidFill>
-                      <a:schemeClr val="bg1"/>
-                    </a:solidFill>
+                    <a:noFill/>
                   </a:tcPr>
                 </a:tc>
                 <a:tc>
@@ -16427,9 +16891,7 @@
                     <a:lnB>
                       <a:noFill/>
                     </a:lnB>
-                    <a:solidFill>
-                      <a:schemeClr val="bg1"/>
-                    </a:solidFill>
+                    <a:noFill/>
                   </a:tcPr>
                 </a:tc>
                 <a:extLst>
@@ -16586,9 +17048,9 @@
 </file>
 
 <file path=ppt/theme/theme1.xml><?xml version="1.0" encoding="utf-8"?>
-<a:theme xmlns:a="http://schemas.openxmlformats.org/drawingml/2006/main" name="Тема Office">
+<a:theme xmlns:a="http://schemas.openxmlformats.org/drawingml/2006/main" name="Уголки">
   <a:themeElements>
-    <a:clrScheme name="Стандартная">
+    <a:clrScheme name="Уголки">
       <a:dk1>
         <a:sysClr val="windowText" lastClr="000000"/>
       </a:dk1>
@@ -16596,100 +17058,48 @@
         <a:sysClr val="window" lastClr="FFFFFF"/>
       </a:lt1>
       <a:dk2>
-        <a:srgbClr val="44546A"/>
+        <a:srgbClr val="191B0E"/>
       </a:dk2>
       <a:lt2>
-        <a:srgbClr val="E7E6E6"/>
+        <a:srgbClr val="EFEDE3"/>
       </a:lt2>
       <a:accent1>
-        <a:srgbClr val="4472C4"/>
+        <a:srgbClr val="8C8D86"/>
       </a:accent1>
       <a:accent2>
-        <a:srgbClr val="ED7D31"/>
+        <a:srgbClr val="E6C069"/>
       </a:accent2>
       <a:accent3>
-        <a:srgbClr val="A5A5A5"/>
+        <a:srgbClr val="897B61"/>
       </a:accent3>
       <a:accent4>
-        <a:srgbClr val="FFC000"/>
+        <a:srgbClr val="8DAB8E"/>
       </a:accent4>
       <a:accent5>
-        <a:srgbClr val="5B9BD5"/>
+        <a:srgbClr val="77A2BB"/>
       </a:accent5>
       <a:accent6>
-        <a:srgbClr val="70AD47"/>
+        <a:srgbClr val="E28394"/>
       </a:accent6>
       <a:hlink>
-        <a:srgbClr val="0563C1"/>
+        <a:srgbClr val="77A2BB"/>
       </a:hlink>
       <a:folHlink>
-        <a:srgbClr val="954F72"/>
+        <a:srgbClr val="957A99"/>
       </a:folHlink>
     </a:clrScheme>
-    <a:fontScheme name="Стандартная">
+    <a:fontScheme name="Уголки">
       <a:majorFont>
-        <a:latin typeface="Calibri Light" panose="020F0302020204030204"/>
+        <a:latin typeface="Franklin Gothic Book" panose="020B0503020102020204"/>
         <a:ea typeface=""/>
         <a:cs typeface=""/>
-        <a:font script="Jpan" typeface="游ゴシック Light"/>
-        <a:font script="Hang" typeface="맑은 고딕"/>
-        <a:font script="Hans" typeface="等线 Light"/>
-        <a:font script="Hant" typeface="新細明體"/>
-        <a:font script="Arab" typeface="Times New Roman"/>
-        <a:font script="Hebr" typeface="Times New Roman"/>
-        <a:font script="Thai" typeface="Angsana New"/>
-        <a:font script="Ethi" typeface="Nyala"/>
-        <a:font script="Beng" typeface="Vrinda"/>
-        <a:font script="Gujr" typeface="Shruti"/>
-        <a:font script="Khmr" typeface="MoolBoran"/>
-        <a:font script="Knda" typeface="Tunga"/>
-        <a:font script="Guru" typeface="Raavi"/>
-        <a:font script="Cans" typeface="Euphemia"/>
-        <a:font script="Cher" typeface="Plantagenet Cherokee"/>
-        <a:font script="Yiii" typeface="Microsoft Yi Baiti"/>
-        <a:font script="Tibt" typeface="Microsoft Himalaya"/>
-        <a:font script="Thaa" typeface="MV Boli"/>
-        <a:font script="Deva" typeface="Mangal"/>
-        <a:font script="Telu" typeface="Gautami"/>
-        <a:font script="Taml" typeface="Latha"/>
-        <a:font script="Syrc" typeface="Estrangelo Edessa"/>
-        <a:font script="Orya" typeface="Kalinga"/>
-        <a:font script="Mlym" typeface="Kartika"/>
-        <a:font script="Laoo" typeface="DokChampa"/>
-        <a:font script="Sinh" typeface="Iskoola Pota"/>
-        <a:font script="Mong" typeface="Mongolian Baiti"/>
-        <a:font script="Viet" typeface="Times New Roman"/>
-        <a:font script="Uigh" typeface="Microsoft Uighur"/>
-        <a:font script="Geor" typeface="Sylfaen"/>
-        <a:font script="Armn" typeface="Arial"/>
-        <a:font script="Bugi" typeface="Leelawadee UI"/>
-        <a:font script="Bopo" typeface="Microsoft JhengHei"/>
-        <a:font script="Java" typeface="Javanese Text"/>
-        <a:font script="Lisu" typeface="Segoe UI"/>
-        <a:font script="Mymr" typeface="Myanmar Text"/>
-        <a:font script="Nkoo" typeface="Ebrima"/>
-        <a:font script="Olck" typeface="Nirmala UI"/>
-        <a:font script="Osma" typeface="Ebrima"/>
-        <a:font script="Phag" typeface="Phagspa"/>
-        <a:font script="Syrn" typeface="Estrangelo Edessa"/>
-        <a:font script="Syrj" typeface="Estrangelo Edessa"/>
-        <a:font script="Syre" typeface="Estrangelo Edessa"/>
-        <a:font script="Sora" typeface="Nirmala UI"/>
-        <a:font script="Tale" typeface="Microsoft Tai Le"/>
-        <a:font script="Talu" typeface="Microsoft New Tai Lue"/>
-        <a:font script="Tfng" typeface="Ebrima"/>
-      </a:majorFont>
-      <a:minorFont>
-        <a:latin typeface="Calibri" panose="020F0502020204030204"/>
-        <a:ea typeface=""/>
-        <a:cs typeface=""/>
-        <a:font script="Jpan" typeface="游ゴシック"/>
-        <a:font script="Hang" typeface="맑은 고딕"/>
-        <a:font script="Hans" typeface="等线"/>
-        <a:font script="Hant" typeface="新細明體"/>
-        <a:font script="Arab" typeface="Arial"/>
-        <a:font script="Hebr" typeface="Arial"/>
-        <a:font script="Thai" typeface="Cordia New"/>
+        <a:font script="Jpan" typeface="メイリオ"/>
+        <a:font script="Hang" typeface="돋움"/>
+        <a:font script="Hans" typeface="华文楷体"/>
+        <a:font script="Hant" typeface="微軟正黑體"/>
+        <a:font script="Arab" typeface="Tahoma"/>
+        <a:font script="Hebr" typeface="Aharoni"/>
+        <a:font script="Thai" typeface="LilyUPC"/>
         <a:font script="Ethi" typeface="Nyala"/>
         <a:font script="Beng" typeface="Vrinda"/>
         <a:font script="Gujr" typeface="Shruti"/>
@@ -16710,29 +17120,47 @@
         <a:font script="Laoo" typeface="DokChampa"/>
         <a:font script="Sinh" typeface="Iskoola Pota"/>
         <a:font script="Mong" typeface="Mongolian Baiti"/>
-        <a:font script="Viet" typeface="Arial"/>
+        <a:font script="Viet" typeface="Tahoma"/>
         <a:font script="Uigh" typeface="Microsoft Uighur"/>
         <a:font script="Geor" typeface="Sylfaen"/>
-        <a:font script="Armn" typeface="Arial"/>
-        <a:font script="Bugi" typeface="Leelawadee UI"/>
-        <a:font script="Bopo" typeface="Microsoft JhengHei"/>
-        <a:font script="Java" typeface="Javanese Text"/>
-        <a:font script="Lisu" typeface="Segoe UI"/>
-        <a:font script="Mymr" typeface="Myanmar Text"/>
-        <a:font script="Nkoo" typeface="Ebrima"/>
-        <a:font script="Olck" typeface="Nirmala UI"/>
-        <a:font script="Osma" typeface="Ebrima"/>
-        <a:font script="Phag" typeface="Phagspa"/>
-        <a:font script="Syrn" typeface="Estrangelo Edessa"/>
-        <a:font script="Syrj" typeface="Estrangelo Edessa"/>
-        <a:font script="Syre" typeface="Estrangelo Edessa"/>
-        <a:font script="Sora" typeface="Nirmala UI"/>
-        <a:font script="Tale" typeface="Microsoft Tai Le"/>
-        <a:font script="Talu" typeface="Microsoft New Tai Lue"/>
-        <a:font script="Tfng" typeface="Ebrima"/>
+      </a:majorFont>
+      <a:minorFont>
+        <a:latin typeface="Franklin Gothic Book" panose="020B0503020102020204"/>
+        <a:ea typeface=""/>
+        <a:cs typeface=""/>
+        <a:font script="Jpan" typeface="メイリオ"/>
+        <a:font script="Hang" typeface="돋움"/>
+        <a:font script="Hans" typeface="华文楷体"/>
+        <a:font script="Hant" typeface="微軟正黑體"/>
+        <a:font script="Arab" typeface="Tahoma"/>
+        <a:font script="Hebr" typeface="Aharoni"/>
+        <a:font script="Thai" typeface="LilyUPC"/>
+        <a:font script="Ethi" typeface="Nyala"/>
+        <a:font script="Beng" typeface="Vrinda"/>
+        <a:font script="Gujr" typeface="Shruti"/>
+        <a:font script="Khmr" typeface="DaunPenh"/>
+        <a:font script="Knda" typeface="Tunga"/>
+        <a:font script="Guru" typeface="Raavi"/>
+        <a:font script="Cans" typeface="Euphemia"/>
+        <a:font script="Cher" typeface="Plantagenet Cherokee"/>
+        <a:font script="Yiii" typeface="Microsoft Yi Baiti"/>
+        <a:font script="Tibt" typeface="Microsoft Himalaya"/>
+        <a:font script="Thaa" typeface="MV Boli"/>
+        <a:font script="Deva" typeface="Mangal"/>
+        <a:font script="Telu" typeface="Gautami"/>
+        <a:font script="Taml" typeface="Latha"/>
+        <a:font script="Syrc" typeface="Estrangelo Edessa"/>
+        <a:font script="Orya" typeface="Kalinga"/>
+        <a:font script="Mlym" typeface="Kartika"/>
+        <a:font script="Laoo" typeface="DokChampa"/>
+        <a:font script="Sinh" typeface="Iskoola Pota"/>
+        <a:font script="Mong" typeface="Mongolian Baiti"/>
+        <a:font script="Viet" typeface="Tahoma"/>
+        <a:font script="Uigh" typeface="Microsoft Uighur"/>
+        <a:font script="Geor" typeface="Sylfaen"/>
       </a:minorFont>
     </a:fontScheme>
-    <a:fmtScheme name="Стандартная">
+    <a:fmtScheme name="Уголки">
       <a:fillStyleLst>
         <a:solidFill>
           <a:schemeClr val="phClr"/>
@@ -16741,23 +17169,23 @@
           <a:gsLst>
             <a:gs pos="0">
               <a:schemeClr val="phClr">
+                <a:tint val="67000"/>
+                <a:satMod val="105000"/>
                 <a:lumMod val="110000"/>
-                <a:satMod val="105000"/>
-                <a:tint val="67000"/>
               </a:schemeClr>
             </a:gs>
             <a:gs pos="50000">
               <a:schemeClr val="phClr">
+                <a:tint val="73000"/>
+                <a:satMod val="103000"/>
                 <a:lumMod val="105000"/>
-                <a:satMod val="103000"/>
-                <a:tint val="73000"/>
               </a:schemeClr>
             </a:gs>
             <a:gs pos="100000">
               <a:schemeClr val="phClr">
+                <a:tint val="81000"/>
+                <a:satMod val="109000"/>
                 <a:lumMod val="105000"/>
-                <a:satMod val="109000"/>
-                <a:tint val="81000"/>
               </a:schemeClr>
             </a:gs>
           </a:gsLst>
@@ -16767,23 +17195,23 @@
           <a:gsLst>
             <a:gs pos="0">
               <a:schemeClr val="phClr">
+                <a:tint val="94000"/>
                 <a:satMod val="103000"/>
                 <a:lumMod val="102000"/>
-                <a:tint val="94000"/>
               </a:schemeClr>
             </a:gs>
             <a:gs pos="50000">
               <a:schemeClr val="phClr">
+                <a:shade val="100000"/>
                 <a:satMod val="110000"/>
                 <a:lumMod val="100000"/>
-                <a:shade val="100000"/>
               </a:schemeClr>
             </a:gs>
             <a:gs pos="100000">
               <a:schemeClr val="phClr">
+                <a:shade val="78000"/>
+                <a:satMod val="120000"/>
                 <a:lumMod val="99000"/>
-                <a:satMod val="120000"/>
-                <a:shade val="78000"/>
               </a:schemeClr>
             </a:gs>
           </a:gsLst>
@@ -16791,26 +17219,23 @@
         </a:gradFill>
       </a:fillStyleLst>
       <a:lnStyleLst>
-        <a:ln w="6350" cap="flat" cmpd="sng" algn="ctr">
+        <a:ln w="6350" cap="flat" cmpd="sng" algn="in">
           <a:solidFill>
             <a:schemeClr val="phClr"/>
           </a:solidFill>
           <a:prstDash val="solid"/>
-          <a:miter lim="800000"/>
         </a:ln>
-        <a:ln w="12700" cap="flat" cmpd="sng" algn="ctr">
+        <a:ln w="34925" cap="flat" cmpd="sng" algn="in">
           <a:solidFill>
             <a:schemeClr val="phClr"/>
           </a:solidFill>
           <a:prstDash val="solid"/>
-          <a:miter lim="800000"/>
         </a:ln>
-        <a:ln w="19050" cap="flat" cmpd="sng" algn="ctr">
+        <a:ln w="19050" cap="flat" cmpd="sng" algn="in">
           <a:solidFill>
             <a:schemeClr val="phClr"/>
           </a:solidFill>
           <a:prstDash val="solid"/>
-          <a:miter lim="800000"/>
         </a:ln>
       </a:lnStyleLst>
       <a:effectStyleLst>
@@ -16824,7 +17249,7 @@
           <a:effectLst>
             <a:outerShdw blurRad="57150" dist="19050" dir="5400000" algn="ctr" rotWithShape="0">
               <a:srgbClr val="000000">
-                <a:alpha val="63000"/>
+                <a:alpha val="35000"/>
               </a:srgbClr>
             </a:outerShdw>
           </a:effectLst>
@@ -16845,16 +17270,16 @@
             <a:gs pos="0">
               <a:schemeClr val="phClr">
                 <a:tint val="93000"/>
+                <a:shade val="98000"/>
                 <a:satMod val="150000"/>
-                <a:shade val="98000"/>
                 <a:lumMod val="102000"/>
               </a:schemeClr>
             </a:gs>
             <a:gs pos="50000">
               <a:schemeClr val="phClr">
                 <a:tint val="98000"/>
+                <a:shade val="90000"/>
                 <a:satMod val="130000"/>
-                <a:shade val="90000"/>
                 <a:lumMod val="103000"/>
               </a:schemeClr>
             </a:gs>
@@ -16874,7 +17299,7 @@
   <a:extraClrSchemeLst/>
   <a:extLst>
     <a:ext uri="{05A4C25C-085E-4340-85A3-A5531E510DB2}">
-      <thm15:themeFamily xmlns:thm15="http://schemas.microsoft.com/office/thememl/2012/main" name="Office Theme" id="{62F939B6-93AF-4DB8-9C6B-D6C7DFDC589F}" vid="{4A3C46E8-61CC-4603-A589-7422A47A8E4A}"/>
+      <thm15:themeFamily xmlns:thm15="http://schemas.microsoft.com/office/thememl/2012/main" name="Crop" id="{EC9488ED-E761-4D60-9AC4-764D1FE2C171}" vid="{CE19780C-D67D-4C13-9DE9-A52BC3BA51B4}"/>
     </a:ext>
   </a:extLst>
 </a:theme>
